--- a/CSE 213 (OOP)/Lecture 9-Dynamic Memory Allocation.pptx
+++ b/CSE 213 (OOP)/Lecture 9-Dynamic Memory Allocation.pptx
@@ -14,14 +14,18 @@
     <p:sldId id="262" r:id="rId8"/>
     <p:sldId id="263" r:id="rId9"/>
     <p:sldId id="264" r:id="rId10"/>
-    <p:sldId id="265" r:id="rId11"/>
-    <p:sldId id="266" r:id="rId12"/>
-    <p:sldId id="267" r:id="rId13"/>
-    <p:sldId id="268" r:id="rId14"/>
-    <p:sldId id="269" r:id="rId15"/>
-    <p:sldId id="271" r:id="rId16"/>
-    <p:sldId id="272" r:id="rId17"/>
-    <p:sldId id="270" r:id="rId18"/>
+    <p:sldId id="273" r:id="rId11"/>
+    <p:sldId id="274" r:id="rId12"/>
+    <p:sldId id="275" r:id="rId13"/>
+    <p:sldId id="276" r:id="rId14"/>
+    <p:sldId id="265" r:id="rId15"/>
+    <p:sldId id="266" r:id="rId16"/>
+    <p:sldId id="267" r:id="rId17"/>
+    <p:sldId id="268" r:id="rId18"/>
+    <p:sldId id="269" r:id="rId19"/>
+    <p:sldId id="271" r:id="rId20"/>
+    <p:sldId id="272" r:id="rId21"/>
+    <p:sldId id="270" r:id="rId22"/>
   </p:sldIdLst>
   <p:sldSz cx="12192000" cy="6858000"/>
   <p:notesSz cx="6858000" cy="9144000"/>
@@ -850,7 +854,7 @@
           <a:p>
             <a:fld id="{D866569F-AF51-45E6-8BD1-DFF76C0D9C7D}" type="datetimeFigureOut">
               <a:rPr lang="en-US" smtClean="0"/>
-              <a:t>6/29/2026</a:t>
+              <a:t>7/2/2026</a:t>
             </a:fld>
             <a:endParaRPr lang="en-US"/>
           </a:p>
@@ -1101,7 +1105,7 @@
           <a:p>
             <a:fld id="{D866569F-AF51-45E6-8BD1-DFF76C0D9C7D}" type="datetimeFigureOut">
               <a:rPr lang="en-US" smtClean="0"/>
-              <a:t>6/29/2026</a:t>
+              <a:t>7/2/2026</a:t>
             </a:fld>
             <a:endParaRPr lang="en-US"/>
           </a:p>
@@ -1415,7 +1419,7 @@
           <a:p>
             <a:fld id="{D866569F-AF51-45E6-8BD1-DFF76C0D9C7D}" type="datetimeFigureOut">
               <a:rPr lang="en-US" smtClean="0"/>
-              <a:t>6/29/2026</a:t>
+              <a:t>7/2/2026</a:t>
             </a:fld>
             <a:endParaRPr lang="en-US"/>
           </a:p>
@@ -1756,7 +1760,7 @@
           <a:p>
             <a:fld id="{D866569F-AF51-45E6-8BD1-DFF76C0D9C7D}" type="datetimeFigureOut">
               <a:rPr lang="en-US" smtClean="0"/>
-              <a:t>6/29/2026</a:t>
+              <a:t>7/2/2026</a:t>
             </a:fld>
             <a:endParaRPr lang="en-US"/>
           </a:p>
@@ -2070,7 +2074,7 @@
           <a:p>
             <a:fld id="{D866569F-AF51-45E6-8BD1-DFF76C0D9C7D}" type="datetimeFigureOut">
               <a:rPr lang="en-US" smtClean="0"/>
-              <a:t>6/29/2026</a:t>
+              <a:t>7/2/2026</a:t>
             </a:fld>
             <a:endParaRPr lang="en-US"/>
           </a:p>
@@ -2463,7 +2467,7 @@
           <a:p>
             <a:fld id="{D866569F-AF51-45E6-8BD1-DFF76C0D9C7D}" type="datetimeFigureOut">
               <a:rPr lang="en-US" smtClean="0"/>
-              <a:t>6/29/2026</a:t>
+              <a:t>7/2/2026</a:t>
             </a:fld>
             <a:endParaRPr lang="en-US"/>
           </a:p>
@@ -2633,7 +2637,7 @@
           <a:p>
             <a:fld id="{D866569F-AF51-45E6-8BD1-DFF76C0D9C7D}" type="datetimeFigureOut">
               <a:rPr lang="en-US" smtClean="0"/>
-              <a:t>6/29/2026</a:t>
+              <a:t>7/2/2026</a:t>
             </a:fld>
             <a:endParaRPr lang="en-US"/>
           </a:p>
@@ -2813,7 +2817,7 @@
           <a:p>
             <a:fld id="{D866569F-AF51-45E6-8BD1-DFF76C0D9C7D}" type="datetimeFigureOut">
               <a:rPr lang="en-US" smtClean="0"/>
-              <a:t>6/29/2026</a:t>
+              <a:t>7/2/2026</a:t>
             </a:fld>
             <a:endParaRPr lang="en-US"/>
           </a:p>
@@ -2989,7 +2993,7 @@
           <a:p>
             <a:fld id="{D866569F-AF51-45E6-8BD1-DFF76C0D9C7D}" type="datetimeFigureOut">
               <a:rPr lang="en-US" smtClean="0"/>
-              <a:t>6/29/2026</a:t>
+              <a:t>7/2/2026</a:t>
             </a:fld>
             <a:endParaRPr lang="en-US"/>
           </a:p>
@@ -3236,7 +3240,7 @@
           <a:p>
             <a:fld id="{D866569F-AF51-45E6-8BD1-DFF76C0D9C7D}" type="datetimeFigureOut">
               <a:rPr lang="en-US" smtClean="0"/>
-              <a:t>6/29/2026</a:t>
+              <a:t>7/2/2026</a:t>
             </a:fld>
             <a:endParaRPr lang="en-US"/>
           </a:p>
@@ -3468,7 +3472,7 @@
           <a:p>
             <a:fld id="{D866569F-AF51-45E6-8BD1-DFF76C0D9C7D}" type="datetimeFigureOut">
               <a:rPr lang="en-US" smtClean="0"/>
-              <a:t>6/29/2026</a:t>
+              <a:t>7/2/2026</a:t>
             </a:fld>
             <a:endParaRPr lang="en-US"/>
           </a:p>
@@ -3842,7 +3846,7 @@
           <a:p>
             <a:fld id="{D866569F-AF51-45E6-8BD1-DFF76C0D9C7D}" type="datetimeFigureOut">
               <a:rPr lang="en-US" smtClean="0"/>
-              <a:t>6/29/2026</a:t>
+              <a:t>7/2/2026</a:t>
             </a:fld>
             <a:endParaRPr lang="en-US"/>
           </a:p>
@@ -3965,7 +3969,7 @@
           <a:p>
             <a:fld id="{D866569F-AF51-45E6-8BD1-DFF76C0D9C7D}" type="datetimeFigureOut">
               <a:rPr lang="en-US" smtClean="0"/>
-              <a:t>6/29/2026</a:t>
+              <a:t>7/2/2026</a:t>
             </a:fld>
             <a:endParaRPr lang="en-US"/>
           </a:p>
@@ -4060,7 +4064,7 @@
           <a:p>
             <a:fld id="{D866569F-AF51-45E6-8BD1-DFF76C0D9C7D}" type="datetimeFigureOut">
               <a:rPr lang="en-US" smtClean="0"/>
-              <a:t>6/29/2026</a:t>
+              <a:t>7/2/2026</a:t>
             </a:fld>
             <a:endParaRPr lang="en-US"/>
           </a:p>
@@ -4315,7 +4319,7 @@
           <a:p>
             <a:fld id="{D866569F-AF51-45E6-8BD1-DFF76C0D9C7D}" type="datetimeFigureOut">
               <a:rPr lang="en-US" smtClean="0"/>
-              <a:t>6/29/2026</a:t>
+              <a:t>7/2/2026</a:t>
             </a:fld>
             <a:endParaRPr lang="en-US"/>
           </a:p>
@@ -4578,7 +4582,7 @@
           <a:p>
             <a:fld id="{D866569F-AF51-45E6-8BD1-DFF76C0D9C7D}" type="datetimeFigureOut">
               <a:rPr lang="en-US" smtClean="0"/>
-              <a:t>6/29/2026</a:t>
+              <a:t>7/2/2026</a:t>
             </a:fld>
             <a:endParaRPr lang="en-US"/>
           </a:p>
@@ -5321,7 +5325,7 @@
           <a:p>
             <a:fld id="{D866569F-AF51-45E6-8BD1-DFF76C0D9C7D}" type="datetimeFigureOut">
               <a:rPr lang="en-US" smtClean="0"/>
-              <a:t>6/29/2026</a:t>
+              <a:t>7/2/2026</a:t>
             </a:fld>
             <a:endParaRPr lang="en-US"/>
           </a:p>
@@ -5895,6 +5899,54 @@
           </a:p>
         </p:txBody>
       </p:sp>
+      <p:sp>
+        <p:nvSpPr>
+          <p:cNvPr id="4" name="TextBox 3"/>
+          <p:cNvSpPr txBox="1"/>
+          <p:nvPr/>
+        </p:nvSpPr>
+        <p:spPr>
+          <a:xfrm>
+            <a:off x="5336931" y="5354515"/>
+            <a:ext cx="4264269" cy="646331"/>
+          </a:xfrm>
+          <a:prstGeom prst="rect">
+            <a:avLst/>
+          </a:prstGeom>
+          <a:noFill/>
+        </p:spPr>
+        <p:txBody>
+          <a:bodyPr wrap="square" rtlCol="0">
+            <a:spAutoFit/>
+          </a:bodyPr>
+          <a:lstStyle/>
+          <a:p>
+            <a:r>
+              <a:rPr lang="en-US" dirty="0" err="1" smtClean="0"/>
+              <a:t>Mousumi</a:t>
+            </a:r>
+            <a:r>
+              <a:rPr lang="en-US" dirty="0" smtClean="0"/>
+              <a:t> Hasan,</a:t>
+            </a:r>
+          </a:p>
+          <a:p>
+            <a:r>
+              <a:rPr lang="en-US" dirty="0" smtClean="0"/>
+              <a:t>Assistant Professor, </a:t>
+            </a:r>
+            <a:r>
+              <a:rPr lang="en-US" dirty="0" err="1" smtClean="0"/>
+              <a:t>Dpt.of</a:t>
+            </a:r>
+            <a:r>
+              <a:rPr lang="en-US" dirty="0" smtClean="0"/>
+              <a:t> CSE, BAIUST</a:t>
+            </a:r>
+            <a:endParaRPr lang="en-US" dirty="0"/>
+          </a:p>
+        </p:txBody>
+      </p:sp>
     </p:spTree>
     <p:extLst>
       <p:ext uri="{BB962C8B-B14F-4D97-AF65-F5344CB8AC3E}">
@@ -5905,6 +5957,13 @@
   <p:clrMapOvr>
     <a:masterClrMapping/>
   </p:clrMapOvr>
+  <p:timing>
+    <p:tnLst>
+      <p:par>
+        <p:cTn id="1" dur="indefinite" restart="never" nodeType="tmRoot"/>
+      </p:par>
+    </p:tnLst>
+  </p:timing>
 </p:sld>
 </file>
 
@@ -5937,99 +5996,153 @@
         </p:nvSpPr>
         <p:spPr/>
         <p:txBody>
+          <a:bodyPr/>
+          <a:lstStyle/>
+          <a:p>
+            <a:r>
+              <a:rPr lang="en-US" dirty="0" smtClean="0"/>
+              <a:t>More on Delete Operator</a:t>
+            </a:r>
+            <a:endParaRPr lang="en-US" dirty="0"/>
+          </a:p>
+        </p:txBody>
+      </p:sp>
+      <p:sp>
+        <p:nvSpPr>
+          <p:cNvPr id="3" name="Content Placeholder 2"/>
+          <p:cNvSpPr>
+            <a:spLocks noGrp="1"/>
+          </p:cNvSpPr>
+          <p:nvPr>
+            <p:ph idx="1"/>
+          </p:nvPr>
+        </p:nvSpPr>
+        <p:spPr/>
+        <p:txBody>
           <a:bodyPr>
-            <a:normAutofit fontScale="90000"/>
+            <a:normAutofit fontScale="77500" lnSpcReduction="20000"/>
           </a:bodyPr>
           <a:lstStyle/>
           <a:p>
             <a:r>
-              <a:rPr lang="en-US" b="1" dirty="0"/>
-              <a:t>Example 2: C++ new and delete Operator for Arrays</a:t>
-            </a:r>
-            <a:br>
-              <a:rPr lang="en-US" b="1" dirty="0"/>
-            </a:br>
+              <a:rPr lang="en-US" dirty="0"/>
+              <a:t>A destructor and delete are related, but they do different </a:t>
+            </a:r>
+            <a:r>
+              <a:rPr lang="en-US" dirty="0" err="1"/>
+              <a:t>jobs.Destructor</a:t>
+            </a:r>
+            <a:r>
+              <a:rPr lang="en-US" dirty="0"/>
+              <a:t> (~</a:t>
+            </a:r>
+            <a:r>
+              <a:rPr lang="en-US" dirty="0" err="1"/>
+              <a:t>ClassName</a:t>
+            </a:r>
+            <a:r>
+              <a:rPr lang="en-US" dirty="0"/>
+              <a:t>()): Cleans up the resources owned by an </a:t>
+            </a:r>
+            <a:r>
+              <a:rPr lang="en-US" dirty="0" err="1"/>
+              <a:t>object.delete</a:t>
+            </a:r>
+            <a:r>
+              <a:rPr lang="en-US" dirty="0"/>
+              <a:t>: Frees </a:t>
+            </a:r>
+            <a:r>
+              <a:rPr lang="en-US" dirty="0" smtClean="0"/>
+              <a:t>dynamically </a:t>
+            </a:r>
+            <a:r>
+              <a:rPr lang="en-US" dirty="0"/>
+              <a:t>allocated memory and automatically calls the destructor</a:t>
+            </a:r>
+            <a:r>
+              <a:rPr lang="en-US" dirty="0" smtClean="0"/>
+              <a:t>.</a:t>
+            </a:r>
+          </a:p>
+          <a:p>
+            <a:pPr marL="0" indent="0">
+              <a:buNone/>
+            </a:pPr>
+            <a:r>
+              <a:rPr lang="en-US" dirty="0"/>
+              <a:t>class Test {</a:t>
+            </a:r>
+          </a:p>
+          <a:p>
+            <a:pPr marL="0" indent="0">
+              <a:buNone/>
+            </a:pPr>
+            <a:r>
+              <a:rPr lang="en-US" dirty="0"/>
+              <a:t>public:</a:t>
+            </a:r>
+          </a:p>
+          <a:p>
+            <a:pPr marL="0" indent="0">
+              <a:buNone/>
+            </a:pPr>
+            <a:r>
+              <a:rPr lang="en-US" dirty="0"/>
+              <a:t>    ~Test() {</a:t>
+            </a:r>
+          </a:p>
+          <a:p>
+            <a:pPr marL="0" indent="0">
+              <a:buNone/>
+            </a:pPr>
+            <a:r>
+              <a:rPr lang="en-US" dirty="0"/>
+              <a:t>        </a:t>
+            </a:r>
+            <a:r>
+              <a:rPr lang="en-US" dirty="0" err="1"/>
+              <a:t>cout</a:t>
+            </a:r>
+            <a:r>
+              <a:rPr lang="en-US" dirty="0"/>
+              <a:t> &lt;&lt; "Destructor called\n";</a:t>
+            </a:r>
+          </a:p>
+          <a:p>
+            <a:pPr marL="0" indent="0">
+              <a:buNone/>
+            </a:pPr>
+            <a:r>
+              <a:rPr lang="en-US" dirty="0"/>
+              <a:t>    }</a:t>
+            </a:r>
+          </a:p>
+          <a:p>
+            <a:pPr marL="0" indent="0">
+              <a:buNone/>
+            </a:pPr>
+            <a:r>
+              <a:rPr lang="en-US" dirty="0"/>
+              <a:t>};</a:t>
+            </a:r>
+          </a:p>
+          <a:p>
+            <a:pPr marL="0" indent="0">
+              <a:buNone/>
+            </a:pPr>
             <a:endParaRPr lang="en-US" dirty="0"/>
           </a:p>
-        </p:txBody>
-      </p:sp>
-      <p:sp>
-        <p:nvSpPr>
-          <p:cNvPr id="3" name="Content Placeholder 2"/>
-          <p:cNvSpPr>
-            <a:spLocks noGrp="1"/>
-          </p:cNvSpPr>
-          <p:nvPr>
-            <p:ph idx="1"/>
-          </p:nvPr>
-        </p:nvSpPr>
-        <p:spPr>
-          <a:xfrm>
-            <a:off x="462181" y="1649601"/>
-            <a:ext cx="5629337" cy="5947987"/>
-          </a:xfrm>
-        </p:spPr>
-        <p:txBody>
-          <a:bodyPr>
-            <a:normAutofit fontScale="25000" lnSpcReduction="20000"/>
-          </a:bodyPr>
-          <a:lstStyle/>
-          <a:p>
-            <a:r>
-              <a:rPr lang="en-US" sz="6400" dirty="0"/>
-              <a:t>// C++ Program to store GPA of n number of students and display it</a:t>
-            </a:r>
-          </a:p>
-          <a:p>
-            <a:r>
-              <a:rPr lang="en-US" sz="6400" dirty="0"/>
-              <a:t>// where n is the number of students entered by the user</a:t>
-            </a:r>
-          </a:p>
-          <a:p>
-            <a:pPr marL="0" indent="0">
-              <a:buNone/>
-            </a:pPr>
-            <a:r>
-              <a:rPr lang="en-US" sz="6400" dirty="0"/>
-              <a:t>#include &lt;</a:t>
-            </a:r>
-            <a:r>
-              <a:rPr lang="en-US" sz="6400" dirty="0" err="1"/>
-              <a:t>iostream</a:t>
-            </a:r>
-            <a:r>
-              <a:rPr lang="en-US" sz="6400" dirty="0"/>
-              <a:t>&gt;</a:t>
-            </a:r>
-          </a:p>
-          <a:p>
-            <a:pPr marL="0" indent="0">
-              <a:buNone/>
-            </a:pPr>
-            <a:r>
-              <a:rPr lang="en-US" sz="6400" dirty="0"/>
-              <a:t>using namespace </a:t>
-            </a:r>
-            <a:r>
-              <a:rPr lang="en-US" sz="6400" dirty="0" err="1"/>
-              <a:t>std</a:t>
-            </a:r>
-            <a:r>
-              <a:rPr lang="en-US" sz="6400" dirty="0"/>
-              <a:t>;</a:t>
-            </a:r>
-          </a:p>
-          <a:p>
-            <a:pPr marL="0" indent="0">
-              <a:buNone/>
-            </a:pPr>
-            <a:r>
-              <a:rPr lang="en-US" sz="6400" dirty="0" err="1"/>
+          <a:p>
+            <a:pPr marL="0" indent="0">
+              <a:buNone/>
+            </a:pPr>
+            <a:r>
+              <a:rPr lang="en-US" dirty="0" err="1"/>
               <a:t>int</a:t>
             </a:r>
             <a:r>
-              <a:rPr lang="en-US" sz="6400" dirty="0"/>
+              <a:rPr lang="en-US" dirty="0"/>
               <a:t> main() {</a:t>
             </a:r>
           </a:p>
@@ -6038,546 +6151,41 @@
               <a:buNone/>
             </a:pPr>
             <a:r>
-              <a:rPr lang="en-US" sz="6400" dirty="0"/>
-              <a:t> </a:t>
-            </a:r>
-            <a:r>
-              <a:rPr lang="en-US" sz="6400" dirty="0" err="1"/>
-              <a:t>int</a:t>
-            </a:r>
-            <a:r>
-              <a:rPr lang="en-US" sz="6400" dirty="0"/>
-              <a:t> </a:t>
-            </a:r>
-            <a:r>
-              <a:rPr lang="en-US" sz="6400" dirty="0" err="1"/>
-              <a:t>num</a:t>
-            </a:r>
-            <a:r>
-              <a:rPr lang="en-US" sz="6400" dirty="0"/>
-              <a:t>;</a:t>
-            </a:r>
-          </a:p>
-          <a:p>
-            <a:pPr marL="0" indent="0">
-              <a:buNone/>
-            </a:pPr>
-            <a:r>
-              <a:rPr lang="en-US" sz="6400" dirty="0" err="1"/>
-              <a:t>cout</a:t>
-            </a:r>
-            <a:r>
-              <a:rPr lang="en-US" sz="6400" dirty="0"/>
-              <a:t> &lt;&lt; "Enter total number of students: ";</a:t>
-            </a:r>
-          </a:p>
-          <a:p>
-            <a:pPr marL="0" indent="0">
-              <a:buNone/>
-            </a:pPr>
-            <a:r>
-              <a:rPr lang="en-US" sz="6400" dirty="0" err="1"/>
-              <a:t>cin</a:t>
-            </a:r>
-            <a:r>
-              <a:rPr lang="en-US" sz="6400" dirty="0"/>
-              <a:t> &gt;&gt; </a:t>
-            </a:r>
-            <a:r>
-              <a:rPr lang="en-US" sz="6400" dirty="0" err="1"/>
-              <a:t>num</a:t>
-            </a:r>
-            <a:r>
-              <a:rPr lang="en-US" sz="6400" dirty="0"/>
-              <a:t>;</a:t>
-            </a:r>
-          </a:p>
-          <a:p>
-            <a:pPr marL="0" indent="0">
-              <a:buNone/>
-            </a:pPr>
-            <a:r>
-              <a:rPr lang="en-US" sz="6400" dirty="0"/>
-              <a:t>float* </a:t>
-            </a:r>
-            <a:r>
-              <a:rPr lang="en-US" sz="6400" dirty="0" err="1"/>
-              <a:t>ptr</a:t>
-            </a:r>
-            <a:r>
-              <a:rPr lang="en-US" sz="6400" dirty="0"/>
-              <a:t>; </a:t>
-            </a:r>
-          </a:p>
-          <a:p>
-            <a:pPr marL="0" indent="0">
-              <a:buNone/>
-            </a:pPr>
-            <a:r>
-              <a:rPr lang="en-US" sz="6400" dirty="0"/>
-              <a:t>// memory allocation of </a:t>
-            </a:r>
-            <a:r>
-              <a:rPr lang="en-US" sz="6400" dirty="0" err="1"/>
-              <a:t>num</a:t>
-            </a:r>
-            <a:r>
-              <a:rPr lang="en-US" sz="6400" dirty="0"/>
-              <a:t> number of floats</a:t>
-            </a:r>
-          </a:p>
-          <a:p>
-            <a:pPr marL="0" indent="0">
-              <a:buNone/>
-            </a:pPr>
-            <a:r>
-              <a:rPr lang="en-US" sz="6400" dirty="0"/>
-              <a:t> </a:t>
-            </a:r>
-            <a:r>
-              <a:rPr lang="en-US" sz="6400" dirty="0" err="1"/>
-              <a:t>ptr</a:t>
-            </a:r>
-            <a:r>
-              <a:rPr lang="en-US" sz="6400" dirty="0"/>
-              <a:t> = new float[</a:t>
-            </a:r>
-            <a:r>
-              <a:rPr lang="en-US" sz="6400" dirty="0" err="1"/>
-              <a:t>num</a:t>
-            </a:r>
-            <a:r>
-              <a:rPr lang="en-US" sz="6400" dirty="0"/>
-              <a:t>];</a:t>
-            </a:r>
-          </a:p>
-          <a:p>
-            <a:pPr marL="0" indent="0">
-              <a:buNone/>
-            </a:pPr>
-            <a:r>
-              <a:rPr lang="en-US" sz="6400" dirty="0" err="1"/>
-              <a:t>cout</a:t>
-            </a:r>
-            <a:r>
-              <a:rPr lang="en-US" sz="6400" dirty="0"/>
-              <a:t> &lt;&lt; "Enter GPA of students." &lt;&lt; </a:t>
-            </a:r>
-            <a:r>
-              <a:rPr lang="en-US" sz="6400" dirty="0" err="1"/>
-              <a:t>endl</a:t>
-            </a:r>
-            <a:r>
-              <a:rPr lang="en-US" sz="6400" dirty="0"/>
-              <a:t>;</a:t>
-            </a:r>
-          </a:p>
-          <a:p>
-            <a:pPr marL="0" indent="0">
-              <a:buNone/>
-            </a:pPr>
-            <a:r>
-              <a:rPr lang="en-US" sz="6400" dirty="0"/>
-              <a:t> for (</a:t>
-            </a:r>
-            <a:r>
-              <a:rPr lang="en-US" sz="6400" dirty="0" err="1"/>
-              <a:t>int</a:t>
-            </a:r>
-            <a:r>
-              <a:rPr lang="en-US" sz="6400" dirty="0"/>
-              <a:t> </a:t>
-            </a:r>
-            <a:r>
-              <a:rPr lang="en-US" sz="6400" dirty="0" err="1"/>
-              <a:t>i</a:t>
-            </a:r>
-            <a:r>
-              <a:rPr lang="en-US" sz="6400" dirty="0"/>
-              <a:t> = 0; </a:t>
-            </a:r>
-            <a:r>
-              <a:rPr lang="en-US" sz="6400" dirty="0" err="1"/>
-              <a:t>i</a:t>
-            </a:r>
-            <a:r>
-              <a:rPr lang="en-US" sz="6400" dirty="0"/>
-              <a:t> &lt; </a:t>
-            </a:r>
-            <a:r>
-              <a:rPr lang="en-US" sz="6400" dirty="0" err="1"/>
-              <a:t>num</a:t>
-            </a:r>
-            <a:r>
-              <a:rPr lang="en-US" sz="6400" dirty="0"/>
-              <a:t>; ++</a:t>
-            </a:r>
-            <a:r>
-              <a:rPr lang="en-US" sz="6400" dirty="0" err="1"/>
-              <a:t>i</a:t>
-            </a:r>
-            <a:r>
-              <a:rPr lang="en-US" sz="6400" dirty="0"/>
-              <a:t>) {</a:t>
-            </a:r>
-          </a:p>
-          <a:p>
-            <a:pPr marL="0" indent="0">
-              <a:buNone/>
-            </a:pPr>
-            <a:r>
-              <a:rPr lang="en-US" sz="6400" dirty="0"/>
-              <a:t>   </a:t>
-            </a:r>
-            <a:r>
-              <a:rPr lang="en-US" sz="6400" dirty="0" err="1"/>
-              <a:t>cout</a:t>
-            </a:r>
-            <a:r>
-              <a:rPr lang="en-US" sz="6400" dirty="0"/>
-              <a:t> &lt;&lt; "Student" &lt;&lt; </a:t>
-            </a:r>
-            <a:r>
-              <a:rPr lang="en-US" sz="6400" dirty="0" err="1"/>
-              <a:t>i</a:t>
-            </a:r>
-            <a:r>
-              <a:rPr lang="en-US" sz="6400" dirty="0"/>
-              <a:t> + 1 &lt;&lt; ": ";</a:t>
-            </a:r>
-          </a:p>
-          <a:p>
-            <a:pPr marL="0" indent="0">
-              <a:buNone/>
-            </a:pPr>
-            <a:r>
-              <a:rPr lang="en-US" sz="6400" dirty="0"/>
-              <a:t>    </a:t>
-            </a:r>
-            <a:r>
-              <a:rPr lang="en-US" sz="6400" dirty="0" err="1"/>
-              <a:t>cin</a:t>
-            </a:r>
-            <a:r>
-              <a:rPr lang="en-US" sz="6400" dirty="0"/>
-              <a:t> &gt;&gt; *(</a:t>
-            </a:r>
-            <a:r>
-              <a:rPr lang="en-US" sz="6400" dirty="0" err="1"/>
-              <a:t>ptr</a:t>
-            </a:r>
-            <a:r>
-              <a:rPr lang="en-US" sz="6400" dirty="0"/>
-              <a:t> + </a:t>
-            </a:r>
-            <a:r>
-              <a:rPr lang="en-US" sz="6400" dirty="0" err="1"/>
-              <a:t>i</a:t>
-            </a:r>
-            <a:r>
-              <a:rPr lang="en-US" sz="6400" dirty="0"/>
-              <a:t>);</a:t>
-            </a:r>
-          </a:p>
-          <a:p>
-            <a:pPr marL="0" indent="0">
-              <a:buNone/>
-            </a:pPr>
-            <a:r>
-              <a:rPr lang="en-US" sz="6400" dirty="0"/>
-              <a:t>  }</a:t>
-            </a:r>
-          </a:p>
-          <a:p>
-            <a:r>
-              <a:rPr lang="en-US" dirty="0"/>
-              <a:t>}</a:t>
-            </a:r>
-          </a:p>
-        </p:txBody>
-      </p:sp>
-      <p:sp>
-        <p:nvSpPr>
-          <p:cNvPr id="5" name="TextBox 4"/>
-          <p:cNvSpPr txBox="1"/>
-          <p:nvPr/>
-        </p:nvSpPr>
-        <p:spPr>
-          <a:xfrm>
-            <a:off x="6454587" y="2460812"/>
-            <a:ext cx="4841769" cy="2554545"/>
-          </a:xfrm>
-          <a:prstGeom prst="rect">
-            <a:avLst/>
-          </a:prstGeom>
-          <a:noFill/>
-        </p:spPr>
-        <p:txBody>
-          <a:bodyPr wrap="square" rtlCol="0">
-            <a:spAutoFit/>
-          </a:bodyPr>
-          <a:lstStyle/>
-          <a:p>
-            <a:r>
-              <a:rPr lang="en-US" sz="1600" dirty="0" err="1"/>
-              <a:t>cout</a:t>
-            </a:r>
-            <a:r>
-              <a:rPr lang="en-US" sz="1600" dirty="0"/>
-              <a:t> &lt;&lt; "\</a:t>
-            </a:r>
-            <a:r>
-              <a:rPr lang="en-US" sz="1600" dirty="0" err="1"/>
-              <a:t>nDisplaying</a:t>
-            </a:r>
-            <a:r>
-              <a:rPr lang="en-US" sz="1600" dirty="0"/>
-              <a:t> GPA of students." &lt;&lt; </a:t>
-            </a:r>
-            <a:r>
-              <a:rPr lang="en-US" sz="1600" dirty="0" err="1"/>
-              <a:t>endl</a:t>
-            </a:r>
-            <a:r>
-              <a:rPr lang="en-US" sz="1600" dirty="0"/>
-              <a:t>;</a:t>
-            </a:r>
-          </a:p>
-          <a:p>
-            <a:endParaRPr lang="en-US" sz="1600" dirty="0">
-              <a:solidFill>
-                <a:schemeClr val="tx2"/>
-              </a:solidFill>
-            </a:endParaRPr>
-          </a:p>
-          <a:p>
-            <a:r>
-              <a:rPr lang="en-US" sz="1600" dirty="0">
-                <a:solidFill>
-                  <a:schemeClr val="tx2"/>
-                </a:solidFill>
-              </a:rPr>
-              <a:t>for (int </a:t>
-            </a:r>
-            <a:r>
-              <a:rPr lang="en-US" sz="1600" dirty="0" err="1">
-                <a:solidFill>
-                  <a:schemeClr val="tx2"/>
-                </a:solidFill>
-              </a:rPr>
-              <a:t>i</a:t>
-            </a:r>
-            <a:r>
-              <a:rPr lang="en-US" sz="1600" dirty="0">
-                <a:solidFill>
-                  <a:schemeClr val="tx2"/>
-                </a:solidFill>
-              </a:rPr>
-              <a:t> = 0; </a:t>
-            </a:r>
-            <a:r>
-              <a:rPr lang="en-US" sz="1600" dirty="0" err="1">
-                <a:solidFill>
-                  <a:schemeClr val="tx2"/>
-                </a:solidFill>
-              </a:rPr>
-              <a:t>i</a:t>
-            </a:r>
-            <a:r>
-              <a:rPr lang="en-US" sz="1600" dirty="0">
-                <a:solidFill>
-                  <a:schemeClr val="tx2"/>
-                </a:solidFill>
-              </a:rPr>
-              <a:t> &lt; num; ++</a:t>
-            </a:r>
-            <a:r>
-              <a:rPr lang="en-US" sz="1600" dirty="0" err="1">
-                <a:solidFill>
-                  <a:schemeClr val="tx2"/>
-                </a:solidFill>
-              </a:rPr>
-              <a:t>i</a:t>
-            </a:r>
-            <a:r>
-              <a:rPr lang="en-US" sz="1600" dirty="0">
-                <a:solidFill>
-                  <a:schemeClr val="tx2"/>
-                </a:solidFill>
-              </a:rPr>
-              <a:t>) {</a:t>
-            </a:r>
-          </a:p>
-          <a:p>
-            <a:r>
-              <a:rPr lang="en-US" sz="1600" dirty="0">
-                <a:solidFill>
-                  <a:schemeClr val="tx2"/>
-                </a:solidFill>
-              </a:rPr>
-              <a:t>    </a:t>
-            </a:r>
-            <a:r>
-              <a:rPr lang="en-US" sz="1600" dirty="0" err="1">
-                <a:solidFill>
-                  <a:schemeClr val="tx2"/>
-                </a:solidFill>
-              </a:rPr>
-              <a:t>cout</a:t>
-            </a:r>
-            <a:r>
-              <a:rPr lang="en-US" sz="1600" dirty="0">
-                <a:solidFill>
-                  <a:schemeClr val="tx2"/>
-                </a:solidFill>
-              </a:rPr>
-              <a:t> &lt;&lt; "Student" &lt;&lt; </a:t>
-            </a:r>
-            <a:r>
-              <a:rPr lang="en-US" sz="1600" dirty="0" err="1">
-                <a:solidFill>
-                  <a:schemeClr val="tx2"/>
-                </a:solidFill>
-              </a:rPr>
-              <a:t>i</a:t>
-            </a:r>
-            <a:r>
-              <a:rPr lang="en-US" sz="1600" dirty="0">
-                <a:solidFill>
-                  <a:schemeClr val="tx2"/>
-                </a:solidFill>
-              </a:rPr>
-              <a:t> + 1 &lt;&lt; ": " &lt;&lt; *(</a:t>
-            </a:r>
-            <a:r>
-              <a:rPr lang="en-US" sz="1600" dirty="0" err="1">
-                <a:solidFill>
-                  <a:schemeClr val="tx2"/>
-                </a:solidFill>
-              </a:rPr>
-              <a:t>ptr</a:t>
-            </a:r>
-            <a:r>
-              <a:rPr lang="en-US" sz="1600" dirty="0">
-                <a:solidFill>
-                  <a:schemeClr val="tx2"/>
-                </a:solidFill>
-              </a:rPr>
-              <a:t> + </a:t>
-            </a:r>
-            <a:r>
-              <a:rPr lang="en-US" sz="1600" dirty="0" err="1">
-                <a:solidFill>
-                  <a:schemeClr val="tx2"/>
-                </a:solidFill>
-              </a:rPr>
-              <a:t>i</a:t>
-            </a:r>
-            <a:r>
-              <a:rPr lang="en-US" sz="1600" dirty="0">
-                <a:solidFill>
-                  <a:schemeClr val="tx2"/>
-                </a:solidFill>
-              </a:rPr>
-              <a:t>) &lt;&lt; </a:t>
-            </a:r>
-            <a:r>
-              <a:rPr lang="en-US" sz="1600" dirty="0" err="1">
-                <a:solidFill>
-                  <a:schemeClr val="tx2"/>
-                </a:solidFill>
-              </a:rPr>
-              <a:t>endl</a:t>
-            </a:r>
-            <a:r>
-              <a:rPr lang="en-US" sz="1600" dirty="0">
-                <a:solidFill>
-                  <a:schemeClr val="tx2"/>
-                </a:solidFill>
-              </a:rPr>
-              <a:t>;</a:t>
-            </a:r>
-          </a:p>
-          <a:p>
-            <a:r>
-              <a:rPr lang="en-US" sz="1600" dirty="0">
-                <a:solidFill>
-                  <a:schemeClr val="tx2"/>
-                </a:solidFill>
-              </a:rPr>
-              <a:t>}</a:t>
-            </a:r>
-          </a:p>
-          <a:p>
-            <a:r>
-              <a:rPr lang="en-US" sz="1600" dirty="0">
-                <a:solidFill>
-                  <a:schemeClr val="tx2"/>
-                </a:solidFill>
-              </a:rPr>
-              <a:t>// </a:t>
-            </a:r>
-            <a:r>
-              <a:rPr lang="en-US" sz="1600" dirty="0" err="1">
-                <a:solidFill>
-                  <a:schemeClr val="tx2"/>
-                </a:solidFill>
-              </a:rPr>
-              <a:t>ptr</a:t>
-            </a:r>
-            <a:r>
-              <a:rPr lang="en-US" sz="1600" dirty="0">
-                <a:solidFill>
-                  <a:schemeClr val="tx2"/>
-                </a:solidFill>
-              </a:rPr>
-              <a:t> memory is released</a:t>
-            </a:r>
-          </a:p>
-          <a:p>
-            <a:r>
-              <a:rPr lang="en-US" sz="1600" dirty="0">
-                <a:solidFill>
-                  <a:schemeClr val="tx2"/>
-                </a:solidFill>
-              </a:rPr>
-              <a:t> delete[] </a:t>
-            </a:r>
-            <a:r>
-              <a:rPr lang="en-US" sz="1600" dirty="0" err="1">
-                <a:solidFill>
-                  <a:schemeClr val="tx2"/>
-                </a:solidFill>
-              </a:rPr>
-              <a:t>ptr</a:t>
-            </a:r>
-            <a:r>
-              <a:rPr lang="en-US" sz="1600" dirty="0">
-                <a:solidFill>
-                  <a:schemeClr val="tx2"/>
-                </a:solidFill>
-              </a:rPr>
-              <a:t>;</a:t>
-            </a:r>
-          </a:p>
-          <a:p>
-            <a:r>
-              <a:rPr lang="en-US" sz="1600" dirty="0">
-                <a:solidFill>
-                  <a:schemeClr val="tx2"/>
-                </a:solidFill>
-              </a:rPr>
-              <a:t> return 0;</a:t>
-            </a:r>
-          </a:p>
-          <a:p>
-            <a:r>
-              <a:rPr lang="en-US" sz="1600" dirty="0">
-                <a:solidFill>
-                  <a:schemeClr val="tx2"/>
-                </a:solidFill>
-              </a:rPr>
-              <a:t>}</a:t>
+              <a:rPr lang="en-US" dirty="0"/>
+              <a:t>    Test </a:t>
+            </a:r>
+            <a:r>
+              <a:rPr lang="en-US" dirty="0" err="1"/>
+              <a:t>obj</a:t>
+            </a:r>
+            <a:r>
+              <a:rPr lang="en-US" dirty="0"/>
+              <a:t>;   // Stack object</a:t>
+            </a:r>
+          </a:p>
+          <a:p>
+            <a:pPr marL="0" indent="0">
+              <a:buNone/>
+            </a:pPr>
+            <a:r>
+              <a:rPr lang="en-US" dirty="0"/>
+              <a:t>} // Destructor is called automatically here. </a:t>
+            </a:r>
+            <a:r>
+              <a:rPr lang="en-US" dirty="0" smtClean="0"/>
+              <a:t>we </a:t>
+            </a:r>
+            <a:r>
+              <a:rPr lang="en-US" dirty="0"/>
+              <a:t>do not use delete here because </a:t>
+            </a:r>
+            <a:r>
+              <a:rPr lang="en-US" dirty="0" err="1"/>
+              <a:t>obj</a:t>
+            </a:r>
+            <a:r>
+              <a:rPr lang="en-US" dirty="0"/>
+              <a:t> was not created with new.</a:t>
             </a:r>
           </a:p>
         </p:txBody>
@@ -6585,7 +6193,7 @@
     </p:spTree>
     <p:extLst>
       <p:ext uri="{BB962C8B-B14F-4D97-AF65-F5344CB8AC3E}">
-        <p14:creationId xmlns:p14="http://schemas.microsoft.com/office/powerpoint/2010/main" val="4169546226"/>
+        <p14:creationId xmlns:p14="http://schemas.microsoft.com/office/powerpoint/2010/main" val="2500697116"/>
       </p:ext>
     </p:extLst>
   </p:cSld>
@@ -6614,25 +6222,6 @@
       </p:grpSpPr>
       <p:sp>
         <p:nvSpPr>
-          <p:cNvPr id="2" name="Title 1"/>
-          <p:cNvSpPr>
-            <a:spLocks noGrp="1"/>
-          </p:cNvSpPr>
-          <p:nvPr>
-            <p:ph type="title"/>
-          </p:nvPr>
-        </p:nvSpPr>
-        <p:spPr/>
-        <p:txBody>
-          <a:bodyPr/>
-          <a:lstStyle/>
-          <a:p>
-            <a:endParaRPr lang="en-US"/>
-          </a:p>
-        </p:txBody>
-      </p:sp>
-      <p:sp>
-        <p:nvSpPr>
           <p:cNvPr id="3" name="Content Placeholder 2"/>
           <p:cNvSpPr>
             <a:spLocks noGrp="1"/>
@@ -6643,8 +6232,8 @@
         </p:nvSpPr>
         <p:spPr>
           <a:xfrm>
-            <a:off x="677334" y="1277471"/>
-            <a:ext cx="8596668" cy="4763892"/>
+            <a:off x="677334" y="281355"/>
+            <a:ext cx="8596668" cy="5760008"/>
           </a:xfrm>
         </p:spPr>
         <p:txBody>
@@ -6658,10 +6247,66 @@
             </a:pPr>
             <a:r>
               <a:rPr lang="en-US" dirty="0"/>
-              <a:t>Output</a:t>
-            </a:r>
-          </a:p>
-          <a:p>
+              <a:t>class Test {</a:t>
+            </a:r>
+          </a:p>
+          <a:p>
+            <a:pPr marL="0" indent="0">
+              <a:buNone/>
+            </a:pPr>
+            <a:r>
+              <a:rPr lang="en-US" dirty="0"/>
+              <a:t>public:</a:t>
+            </a:r>
+          </a:p>
+          <a:p>
+            <a:pPr marL="0" indent="0">
+              <a:buNone/>
+            </a:pPr>
+            <a:r>
+              <a:rPr lang="en-US" dirty="0"/>
+              <a:t>    ~Test() {</a:t>
+            </a:r>
+          </a:p>
+          <a:p>
+            <a:pPr marL="0" indent="0">
+              <a:buNone/>
+            </a:pPr>
+            <a:r>
+              <a:rPr lang="en-US" dirty="0"/>
+              <a:t>        </a:t>
+            </a:r>
+            <a:r>
+              <a:rPr lang="en-US" dirty="0" err="1"/>
+              <a:t>cout</a:t>
+            </a:r>
+            <a:r>
+              <a:rPr lang="en-US" dirty="0"/>
+              <a:t> &lt;&lt; "Destructor called\n";</a:t>
+            </a:r>
+          </a:p>
+          <a:p>
+            <a:pPr marL="0" indent="0">
+              <a:buNone/>
+            </a:pPr>
+            <a:r>
+              <a:rPr lang="en-US" dirty="0"/>
+              <a:t>    }</a:t>
+            </a:r>
+          </a:p>
+          <a:p>
+            <a:pPr marL="0" indent="0">
+              <a:buNone/>
+            </a:pPr>
+            <a:r>
+              <a:rPr lang="en-US" dirty="0"/>
+              <a:t>};</a:t>
+            </a:r>
+          </a:p>
+          <a:p>
+            <a:pPr marL="0" indent="0">
+              <a:buNone/>
+            </a:pPr>
             <a:endParaRPr lang="en-US" dirty="0"/>
           </a:p>
           <a:p>
@@ -6669,98 +6314,129 @@
               <a:buNone/>
             </a:pPr>
             <a:r>
-              <a:rPr lang="en-US" dirty="0"/>
-              <a:t>Enter total number of students: 4</a:t>
-            </a:r>
-          </a:p>
-          <a:p>
-            <a:pPr marL="0" indent="0">
-              <a:buNone/>
-            </a:pPr>
-            <a:r>
-              <a:rPr lang="en-US" dirty="0"/>
-              <a:t>Enter GPA of students.</a:t>
-            </a:r>
-          </a:p>
-          <a:p>
-            <a:pPr marL="0" indent="0">
-              <a:buNone/>
-            </a:pPr>
-            <a:r>
-              <a:rPr lang="en-US" dirty="0"/>
-              <a:t>Student1: 3.6</a:t>
-            </a:r>
-          </a:p>
-          <a:p>
-            <a:pPr marL="0" indent="0">
-              <a:buNone/>
-            </a:pPr>
-            <a:r>
-              <a:rPr lang="en-US" dirty="0"/>
-              <a:t>Student2: 3.1</a:t>
-            </a:r>
-          </a:p>
-          <a:p>
-            <a:pPr marL="0" indent="0">
-              <a:buNone/>
-            </a:pPr>
-            <a:r>
-              <a:rPr lang="en-US" dirty="0"/>
-              <a:t>Student3: 3.9</a:t>
-            </a:r>
-          </a:p>
-          <a:p>
-            <a:pPr marL="0" indent="0">
-              <a:buNone/>
-            </a:pPr>
-            <a:r>
-              <a:rPr lang="en-US" dirty="0"/>
-              <a:t>Student4: 2.9</a:t>
-            </a:r>
-          </a:p>
-          <a:p>
-            <a:pPr marL="0" indent="0">
-              <a:buNone/>
-            </a:pPr>
-            <a:r>
-              <a:rPr lang="en-US" dirty="0"/>
-              <a:t>Displaying GPA of students.</a:t>
-            </a:r>
-          </a:p>
-          <a:p>
-            <a:pPr marL="0" indent="0">
-              <a:buNone/>
-            </a:pPr>
-            <a:r>
-              <a:rPr lang="en-US" dirty="0"/>
-              <a:t>Student1: 3.6</a:t>
-            </a:r>
-          </a:p>
-          <a:p>
-            <a:pPr marL="0" indent="0">
-              <a:buNone/>
-            </a:pPr>
-            <a:r>
-              <a:rPr lang="en-US" dirty="0"/>
-              <a:t>Student2: 3.1</a:t>
-            </a:r>
-          </a:p>
-          <a:p>
-            <a:pPr marL="0" indent="0">
-              <a:buNone/>
-            </a:pPr>
-            <a:r>
-              <a:rPr lang="en-US" dirty="0"/>
-              <a:t>Student3: 3.9</a:t>
-            </a:r>
-          </a:p>
-          <a:p>
-            <a:pPr marL="0" indent="0">
-              <a:buNone/>
-            </a:pPr>
-            <a:r>
-              <a:rPr lang="en-US" dirty="0"/>
-              <a:t>Student4: 2.9</a:t>
+              <a:rPr lang="en-US" dirty="0" err="1"/>
+              <a:t>int</a:t>
+            </a:r>
+            <a:r>
+              <a:rPr lang="en-US" dirty="0"/>
+              <a:t> main() {</a:t>
+            </a:r>
+          </a:p>
+          <a:p>
+            <a:pPr marL="0" indent="0">
+              <a:buNone/>
+            </a:pPr>
+            <a:r>
+              <a:rPr lang="en-US" dirty="0"/>
+              <a:t>    Test* </a:t>
+            </a:r>
+            <a:r>
+              <a:rPr lang="en-US" dirty="0" err="1"/>
+              <a:t>obj</a:t>
+            </a:r>
+            <a:r>
+              <a:rPr lang="en-US" dirty="0"/>
+              <a:t> = new Test;</a:t>
+            </a:r>
+          </a:p>
+          <a:p>
+            <a:pPr marL="0" indent="0">
+              <a:buNone/>
+            </a:pPr>
+            <a:endParaRPr lang="en-US" dirty="0"/>
+          </a:p>
+          <a:p>
+            <a:pPr marL="0" indent="0">
+              <a:buNone/>
+            </a:pPr>
+            <a:r>
+              <a:rPr lang="en-US" dirty="0"/>
+              <a:t>    delete </a:t>
+            </a:r>
+            <a:r>
+              <a:rPr lang="en-US" dirty="0" err="1"/>
+              <a:t>obj</a:t>
+            </a:r>
+            <a:r>
+              <a:rPr lang="en-US" dirty="0"/>
+              <a:t>;   // Calls destructor, then frees memory.</a:t>
+            </a:r>
+          </a:p>
+          <a:p>
+            <a:pPr marL="0" indent="0">
+              <a:buNone/>
+            </a:pPr>
+            <a:r>
+              <a:rPr lang="en-US" dirty="0" smtClean="0"/>
+              <a:t>}</a:t>
+            </a:r>
+          </a:p>
+          <a:p>
+            <a:pPr marL="0" indent="0">
+              <a:buNone/>
+            </a:pPr>
+            <a:r>
+              <a:rPr lang="en-US" dirty="0"/>
+              <a:t>Here, delete is necessary because the object was allocated with </a:t>
+            </a:r>
+            <a:r>
+              <a:rPr lang="en-US" dirty="0" err="1"/>
+              <a:t>new.When</a:t>
+            </a:r>
+            <a:r>
+              <a:rPr lang="en-US" dirty="0"/>
+              <a:t> </a:t>
+            </a:r>
+            <a:r>
+              <a:rPr lang="en-US" dirty="0" smtClean="0"/>
+              <a:t>we </a:t>
+            </a:r>
+            <a:r>
+              <a:rPr lang="en-US" dirty="0"/>
+              <a:t>write: </a:t>
+            </a:r>
+            <a:endParaRPr lang="en-US" dirty="0" smtClean="0"/>
+          </a:p>
+          <a:p>
+            <a:pPr marL="0" indent="0">
+              <a:buNone/>
+            </a:pPr>
+            <a:r>
+              <a:rPr lang="en-US" dirty="0" smtClean="0"/>
+              <a:t>delete </a:t>
+            </a:r>
+            <a:r>
+              <a:rPr lang="en-US" dirty="0" err="1"/>
+              <a:t>obj</a:t>
+            </a:r>
+            <a:r>
+              <a:rPr lang="en-US" dirty="0" smtClean="0"/>
+              <a:t>;</a:t>
+            </a:r>
+          </a:p>
+          <a:p>
+            <a:pPr marL="0" indent="0">
+              <a:buNone/>
+            </a:pPr>
+            <a:r>
+              <a:rPr lang="en-US" dirty="0"/>
+              <a:t>the following </a:t>
+            </a:r>
+            <a:r>
+              <a:rPr lang="en-US" dirty="0" err="1"/>
+              <a:t>happens:The</a:t>
+            </a:r>
+            <a:r>
+              <a:rPr lang="en-US" dirty="0"/>
+              <a:t> destructor ~Test() is </a:t>
+            </a:r>
+            <a:r>
+              <a:rPr lang="en-US" dirty="0" err="1"/>
+              <a:t>called.The</a:t>
+            </a:r>
+            <a:r>
+              <a:rPr lang="en-US" dirty="0"/>
+              <a:t> memory occupied by the object is released back to the system.</a:t>
             </a:r>
           </a:p>
         </p:txBody>
@@ -6768,7 +6444,7 @@
     </p:spTree>
     <p:extLst>
       <p:ext uri="{BB962C8B-B14F-4D97-AF65-F5344CB8AC3E}">
-        <p14:creationId xmlns:p14="http://schemas.microsoft.com/office/powerpoint/2010/main" val="2688237654"/>
+        <p14:creationId xmlns:p14="http://schemas.microsoft.com/office/powerpoint/2010/main" val="68600969"/>
       </p:ext>
     </p:extLst>
   </p:cSld>
@@ -6805,12 +6481,22 @@
             <p:ph type="title"/>
           </p:nvPr>
         </p:nvSpPr>
-        <p:spPr/>
-        <p:txBody>
-          <a:bodyPr/>
+        <p:spPr>
+          <a:xfrm>
+            <a:off x="580618" y="222738"/>
+            <a:ext cx="10040490" cy="709247"/>
+          </a:xfrm>
+        </p:spPr>
+        <p:txBody>
+          <a:bodyPr>
+            <a:normAutofit fontScale="90000"/>
+          </a:bodyPr>
           <a:lstStyle/>
           <a:p>
-            <a:endParaRPr lang="en-US"/>
+            <a:r>
+              <a:rPr lang="en-US" dirty="0"/>
+              <a:t>Why delete dynamic memory inside a destructor?</a:t>
+            </a:r>
           </a:p>
         </p:txBody>
       </p:sp>
@@ -6824,82 +6510,183 @@
             <p:ph idx="1"/>
           </p:nvPr>
         </p:nvSpPr>
-        <p:spPr/>
+        <p:spPr>
+          <a:xfrm>
+            <a:off x="677334" y="931985"/>
+            <a:ext cx="10928512" cy="5109377"/>
+          </a:xfrm>
+        </p:spPr>
         <p:txBody>
           <a:bodyPr>
             <a:normAutofit fontScale="92500" lnSpcReduction="20000"/>
           </a:bodyPr>
           <a:lstStyle/>
           <a:p>
-            <a:r>
-              <a:rPr lang="en-US" dirty="0"/>
-              <a:t>In this program, we have asked the user to enter the number of students and store it in the </a:t>
+            <a:pPr marL="0" indent="0">
+              <a:buNone/>
+            </a:pPr>
+            <a:r>
+              <a:rPr lang="en-US" dirty="0"/>
+              <a:t>class Array {</a:t>
+            </a:r>
+          </a:p>
+          <a:p>
+            <a:pPr marL="0" indent="0">
+              <a:buNone/>
+            </a:pPr>
+            <a:r>
+              <a:rPr lang="en-US" dirty="0"/>
+              <a:t>private:</a:t>
+            </a:r>
+          </a:p>
+          <a:p>
+            <a:pPr marL="0" indent="0">
+              <a:buNone/>
+            </a:pPr>
+            <a:r>
+              <a:rPr lang="en-US" dirty="0"/>
+              <a:t>    </a:t>
             </a:r>
             <a:r>
               <a:rPr lang="en-US" dirty="0" err="1"/>
-              <a:t>num</a:t>
-            </a:r>
-            <a:r>
-              <a:rPr lang="en-US" dirty="0"/>
-              <a:t> variable.</a:t>
-            </a:r>
-          </a:p>
-          <a:p>
+              <a:t>int</a:t>
+            </a:r>
+            <a:r>
+              <a:rPr lang="en-US" dirty="0"/>
+              <a:t>* data;</a:t>
+            </a:r>
+          </a:p>
+          <a:p>
+            <a:pPr marL="0" indent="0">
+              <a:buNone/>
+            </a:pPr>
             <a:endParaRPr lang="en-US" dirty="0"/>
           </a:p>
           <a:p>
-            <a:r>
-              <a:rPr lang="en-US" dirty="0"/>
-              <a:t>Then, we have allocated the memory dynamically for the float array using new.</a:t>
-            </a:r>
-          </a:p>
-          <a:p>
+            <a:pPr marL="0" indent="0">
+              <a:buNone/>
+            </a:pPr>
+            <a:r>
+              <a:rPr lang="en-US" dirty="0"/>
+              <a:t>public:</a:t>
+            </a:r>
+          </a:p>
+          <a:p>
+            <a:pPr marL="0" indent="0">
+              <a:buNone/>
+            </a:pPr>
+            <a:r>
+              <a:rPr lang="en-US" dirty="0"/>
+              <a:t>    Array(</a:t>
+            </a:r>
+            <a:r>
+              <a:rPr lang="en-US" dirty="0" err="1"/>
+              <a:t>int</a:t>
+            </a:r>
+            <a:r>
+              <a:rPr lang="en-US" dirty="0"/>
+              <a:t> size) {</a:t>
+            </a:r>
+          </a:p>
+          <a:p>
+            <a:pPr marL="0" indent="0">
+              <a:buNone/>
+            </a:pPr>
+            <a:r>
+              <a:rPr lang="en-US" dirty="0"/>
+              <a:t>        data = new </a:t>
+            </a:r>
+            <a:r>
+              <a:rPr lang="en-US" dirty="0" err="1"/>
+              <a:t>int</a:t>
+            </a:r>
+            <a:r>
+              <a:rPr lang="en-US" dirty="0"/>
+              <a:t>[size];</a:t>
+            </a:r>
+          </a:p>
+          <a:p>
+            <a:pPr marL="0" indent="0">
+              <a:buNone/>
+            </a:pPr>
+            <a:r>
+              <a:rPr lang="en-US" dirty="0"/>
+              <a:t>    }</a:t>
+            </a:r>
+          </a:p>
+          <a:p>
+            <a:pPr marL="0" indent="0">
+              <a:buNone/>
+            </a:pPr>
             <a:endParaRPr lang="en-US" dirty="0"/>
           </a:p>
           <a:p>
-            <a:r>
-              <a:rPr lang="en-US" dirty="0"/>
-              <a:t>We enter data into the array (and later print them) using pointer notation.</a:t>
-            </a:r>
-          </a:p>
-          <a:p>
-            <a:endParaRPr lang="en-US" dirty="0"/>
-          </a:p>
-          <a:p>
-            <a:r>
-              <a:rPr lang="en-US" dirty="0"/>
-              <a:t>After we no longer need the array, we deallocate the array memory using the code delete[] </a:t>
+            <a:pPr marL="0" indent="0">
+              <a:buNone/>
+            </a:pPr>
+            <a:r>
+              <a:rPr lang="en-US" dirty="0"/>
+              <a:t>    ~Array() {</a:t>
+            </a:r>
+          </a:p>
+          <a:p>
+            <a:pPr marL="0" indent="0">
+              <a:buNone/>
+            </a:pPr>
+            <a:r>
+              <a:rPr lang="en-US" dirty="0"/>
+              <a:t>        delete[] data;   // Free the allocated array</a:t>
+            </a:r>
+          </a:p>
+          <a:p>
+            <a:pPr marL="0" indent="0">
+              <a:buNone/>
+            </a:pPr>
+            <a:r>
+              <a:rPr lang="en-US" dirty="0"/>
+              <a:t>    }</a:t>
+            </a:r>
+          </a:p>
+          <a:p>
+            <a:pPr marL="0" indent="0">
+              <a:buNone/>
+            </a:pPr>
+            <a:r>
+              <a:rPr lang="en-US" dirty="0" smtClean="0"/>
+              <a:t>};</a:t>
+            </a:r>
+          </a:p>
+          <a:p>
+            <a:pPr marL="0" indent="0">
+              <a:buNone/>
+            </a:pPr>
+            <a:r>
+              <a:rPr lang="en-US" dirty="0"/>
+              <a:t>The object (Array) may be destroyed automatically or by </a:t>
             </a:r>
             <a:r>
               <a:rPr lang="en-US" dirty="0" err="1"/>
-              <a:t>ptr</a:t>
-            </a:r>
-            <a:r>
-              <a:rPr lang="en-US" dirty="0"/>
-              <a:t>;.</a:t>
-            </a:r>
-          </a:p>
-          <a:p>
-            <a:endParaRPr lang="en-US" dirty="0"/>
-          </a:p>
-          <a:p>
-            <a:r>
-              <a:rPr lang="en-US" dirty="0"/>
-              <a:t>Notice the use of [] after delete. We use the square brackets [] in order to denote that the memory deallocation is that of an array.</a:t>
-            </a:r>
-          </a:p>
-          <a:p>
-            <a:endParaRPr lang="en-US" dirty="0"/>
-          </a:p>
-          <a:p>
-            <a:endParaRPr lang="en-US" dirty="0"/>
+              <a:t>delete.But</a:t>
+            </a:r>
+            <a:r>
+              <a:rPr lang="en-US" dirty="0"/>
+              <a:t> the memory pointed to by data is separate from the object </a:t>
+            </a:r>
+            <a:r>
+              <a:rPr lang="en-US" dirty="0" err="1"/>
+              <a:t>itself.If</a:t>
+            </a:r>
+            <a:r>
+              <a:rPr lang="en-US" dirty="0"/>
+              <a:t> you don't delete[] data in the destructor, that memory remains allocated even after the object is destroyed—a memory leak.</a:t>
+            </a:r>
           </a:p>
         </p:txBody>
       </p:sp>
     </p:spTree>
     <p:extLst>
       <p:ext uri="{BB962C8B-B14F-4D97-AF65-F5344CB8AC3E}">
-        <p14:creationId xmlns:p14="http://schemas.microsoft.com/office/powerpoint/2010/main" val="3425580422"/>
+        <p14:creationId xmlns:p14="http://schemas.microsoft.com/office/powerpoint/2010/main" val="3210578545"/>
       </p:ext>
     </p:extLst>
   </p:cSld>
@@ -6938,88 +6725,59 @@
         </p:nvSpPr>
         <p:spPr>
           <a:xfrm>
-            <a:off x="677333" y="609600"/>
-            <a:ext cx="10160995" cy="829235"/>
+            <a:off x="431149" y="108439"/>
+            <a:ext cx="8596668" cy="735623"/>
           </a:xfrm>
         </p:spPr>
         <p:txBody>
-          <a:bodyPr>
-            <a:normAutofit fontScale="90000"/>
+          <a:bodyPr/>
+          <a:lstStyle/>
+          <a:p>
+            <a:r>
+              <a:rPr lang="en-US" dirty="0" smtClean="0"/>
+              <a:t>Memory </a:t>
+            </a:r>
+            <a:r>
+              <a:rPr lang="en-US" dirty="0"/>
+              <a:t>leak</a:t>
+            </a:r>
+          </a:p>
+        </p:txBody>
+      </p:sp>
+      <p:sp>
+        <p:nvSpPr>
+          <p:cNvPr id="3" name="Content Placeholder 2"/>
+          <p:cNvSpPr>
+            <a:spLocks noGrp="1"/>
+          </p:cNvSpPr>
+          <p:nvPr>
+            <p:ph idx="1"/>
+          </p:nvPr>
+        </p:nvSpPr>
+        <p:spPr>
+          <a:xfrm>
+            <a:off x="431149" y="2242038"/>
+            <a:ext cx="9398651" cy="3640016"/>
+          </a:xfrm>
+        </p:spPr>
+        <p:txBody>
+          <a:bodyPr numCol="2">
+            <a:normAutofit fontScale="92500" lnSpcReduction="10000"/>
           </a:bodyPr>
           <a:lstStyle/>
           <a:p>
-            <a:r>
-              <a:rPr lang="en-US" dirty="0"/>
-              <a:t>Example 3: C++ new and delete Operator for Objects</a:t>
-            </a:r>
-          </a:p>
-        </p:txBody>
-      </p:sp>
-      <p:sp>
-        <p:nvSpPr>
-          <p:cNvPr id="3" name="Content Placeholder 2"/>
-          <p:cNvSpPr>
-            <a:spLocks noGrp="1"/>
-          </p:cNvSpPr>
-          <p:nvPr>
-            <p:ph idx="1"/>
-          </p:nvPr>
-        </p:nvSpPr>
-        <p:spPr>
-          <a:xfrm>
-            <a:off x="677333" y="1438835"/>
-            <a:ext cx="4082925" cy="5244353"/>
-          </a:xfrm>
-        </p:spPr>
-        <p:txBody>
-          <a:bodyPr>
-            <a:normAutofit fontScale="85000" lnSpcReduction="20000"/>
-          </a:bodyPr>
-          <a:lstStyle/>
-          <a:p>
-            <a:r>
-              <a:rPr lang="en-US" dirty="0"/>
-              <a:t>#include &lt;</a:t>
-            </a:r>
-            <a:r>
-              <a:rPr lang="en-US" dirty="0" err="1"/>
-              <a:t>iostream</a:t>
-            </a:r>
-            <a:r>
-              <a:rPr lang="en-US" dirty="0"/>
-              <a:t>&gt;</a:t>
-            </a:r>
-          </a:p>
-          <a:p>
-            <a:r>
-              <a:rPr lang="en-US" dirty="0"/>
-              <a:t>using namespace </a:t>
-            </a:r>
-            <a:r>
-              <a:rPr lang="en-US" dirty="0" err="1"/>
-              <a:t>std</a:t>
-            </a:r>
-            <a:r>
-              <a:rPr lang="en-US" dirty="0"/>
-              <a:t>;</a:t>
-            </a:r>
-          </a:p>
-          <a:p>
-            <a:endParaRPr lang="en-US" dirty="0"/>
-          </a:p>
-          <a:p>
-            <a:r>
-              <a:rPr lang="en-US" dirty="0"/>
-              <a:t>class Student {</a:t>
-            </a:r>
-          </a:p>
-          <a:p>
-            <a:r>
-              <a:rPr lang="en-US" dirty="0"/>
-              <a:t>  private:</a:t>
-            </a:r>
-          </a:p>
-          <a:p>
+            <a:pPr marL="0" indent="0">
+              <a:buNone/>
+            </a:pPr>
+            <a:r>
+              <a:rPr lang="en-US" dirty="0"/>
+              <a:t>class Demo {</a:t>
+            </a:r>
+          </a:p>
+          <a:p>
+            <a:pPr marL="0" indent="0">
+              <a:buNone/>
+            </a:pPr>
             <a:r>
               <a:rPr lang="en-US" dirty="0"/>
               <a:t>    </a:t>
@@ -7030,66 +6788,233 @@
             </a:r>
             <a:r>
               <a:rPr lang="en-US" dirty="0"/>
-              <a:t> age;</a:t>
-            </a:r>
-          </a:p>
-          <a:p>
+              <a:t>* </a:t>
+            </a:r>
+            <a:r>
+              <a:rPr lang="en-US" dirty="0" err="1"/>
+              <a:t>ptr</a:t>
+            </a:r>
+            <a:r>
+              <a:rPr lang="en-US" dirty="0" smtClean="0"/>
+              <a:t>;</a:t>
+            </a:r>
             <a:endParaRPr lang="en-US" dirty="0"/>
           </a:p>
           <a:p>
-            <a:r>
-              <a:rPr lang="en-US" dirty="0"/>
-              <a:t>  public:</a:t>
-            </a:r>
-          </a:p>
-          <a:p>
+            <a:pPr marL="0" indent="0">
+              <a:buNone/>
+            </a:pPr>
+            <a:r>
+              <a:rPr lang="en-US" dirty="0"/>
+              <a:t>public:</a:t>
+            </a:r>
+          </a:p>
+          <a:p>
+            <a:pPr marL="0" indent="0">
+              <a:buNone/>
+            </a:pPr>
+            <a:r>
+              <a:rPr lang="en-US" dirty="0"/>
+              <a:t>    Demo() {</a:t>
+            </a:r>
+          </a:p>
+          <a:p>
+            <a:pPr marL="0" indent="0">
+              <a:buNone/>
+            </a:pPr>
+            <a:r>
+              <a:rPr lang="en-US" dirty="0"/>
+              <a:t>        </a:t>
+            </a:r>
+            <a:r>
+              <a:rPr lang="en-US" dirty="0" err="1"/>
+              <a:t>ptr</a:t>
+            </a:r>
+            <a:r>
+              <a:rPr lang="en-US" dirty="0"/>
+              <a:t> = new </a:t>
+            </a:r>
+            <a:r>
+              <a:rPr lang="en-US" dirty="0" err="1"/>
+              <a:t>int</a:t>
+            </a:r>
+            <a:r>
+              <a:rPr lang="en-US" dirty="0"/>
+              <a:t>(10);</a:t>
+            </a:r>
+          </a:p>
+          <a:p>
+            <a:pPr marL="0" indent="0">
+              <a:buNone/>
+            </a:pPr>
+            <a:r>
+              <a:rPr lang="en-US" dirty="0"/>
+              <a:t>    </a:t>
+            </a:r>
+            <a:r>
+              <a:rPr lang="en-US" dirty="0" smtClean="0"/>
+              <a:t>}</a:t>
+            </a:r>
             <a:endParaRPr lang="en-US" dirty="0"/>
           </a:p>
           <a:p>
-            <a:r>
-              <a:rPr lang="en-US" dirty="0"/>
-              <a:t>    // constructor initializes age to 12</a:t>
-            </a:r>
-          </a:p>
-          <a:p>
-            <a:r>
-              <a:rPr lang="en-US" dirty="0"/>
-              <a:t>    Student() : age(12) {}</a:t>
-            </a:r>
-          </a:p>
-          <a:p>
+            <a:pPr marL="0" indent="0">
+              <a:buNone/>
+            </a:pPr>
+            <a:r>
+              <a:rPr lang="en-US" dirty="0"/>
+              <a:t>    ~Demo() {</a:t>
+            </a:r>
+          </a:p>
+          <a:p>
+            <a:pPr marL="0" indent="0">
+              <a:buNone/>
+            </a:pPr>
+            <a:r>
+              <a:rPr lang="en-US" dirty="0"/>
+              <a:t>        // Nothing here</a:t>
+            </a:r>
+          </a:p>
+          <a:p>
+            <a:pPr marL="0" indent="0">
+              <a:buNone/>
+            </a:pPr>
+            <a:r>
+              <a:rPr lang="en-US" dirty="0"/>
+              <a:t>    }</a:t>
+            </a:r>
+          </a:p>
+          <a:p>
+            <a:pPr marL="0" indent="0">
+              <a:buNone/>
+            </a:pPr>
+            <a:r>
+              <a:rPr lang="en-US" dirty="0" smtClean="0"/>
+              <a:t>};</a:t>
+            </a:r>
             <a:endParaRPr lang="en-US" dirty="0"/>
           </a:p>
           <a:p>
-            <a:r>
-              <a:rPr lang="en-US" dirty="0"/>
-              <a:t>    void </a:t>
-            </a:r>
+            <a:pPr marL="0" indent="0">
+              <a:buNone/>
+            </a:pPr>
             <a:r>
               <a:rPr lang="en-US" dirty="0" err="1"/>
-              <a:t>getAge</a:t>
-            </a:r>
-            <a:r>
-              <a:rPr lang="en-US" dirty="0"/>
-              <a:t>() {</a:t>
-            </a:r>
-          </a:p>
-          <a:p>
-            <a:r>
-              <a:rPr lang="en-US" dirty="0"/>
-              <a:t>      </a:t>
+              <a:t>int</a:t>
+            </a:r>
+            <a:r>
+              <a:rPr lang="en-US" dirty="0"/>
+              <a:t> main() {</a:t>
+            </a:r>
+          </a:p>
+          <a:p>
+            <a:pPr marL="0" indent="0">
+              <a:buNone/>
+            </a:pPr>
+            <a:r>
+              <a:rPr lang="en-US" dirty="0"/>
+              <a:t>    Demo d;</a:t>
+            </a:r>
+          </a:p>
+          <a:p>
+            <a:pPr marL="0" indent="0">
+              <a:buNone/>
+            </a:pPr>
+            <a:r>
+              <a:rPr lang="en-US" dirty="0" smtClean="0"/>
+              <a:t>}</a:t>
+            </a:r>
+          </a:p>
+          <a:p>
+            <a:pPr marL="0" indent="0">
+              <a:buNone/>
+            </a:pPr>
+            <a:r>
+              <a:rPr lang="en-US" dirty="0"/>
+              <a:t>When d is </a:t>
             </a:r>
             <a:r>
               <a:rPr lang="en-US" dirty="0" err="1"/>
-              <a:t>cout</a:t>
-            </a:r>
-            <a:r>
-              <a:rPr lang="en-US" dirty="0"/>
-              <a:t> &lt;&lt; "Age = " &lt;&lt; age &lt;&lt; </a:t>
+              <a:t>destroyed:The</a:t>
+            </a:r>
+            <a:r>
+              <a:rPr lang="en-US" dirty="0"/>
+              <a:t> destructor </a:t>
             </a:r>
             <a:r>
               <a:rPr lang="en-US" dirty="0" err="1"/>
-              <a:t>endl</a:t>
+              <a:t>runs.The</a:t>
+            </a:r>
+            <a:r>
+              <a:rPr lang="en-US" dirty="0"/>
+              <a:t> </a:t>
+            </a:r>
+            <a:r>
+              <a:rPr lang="en-US" dirty="0" err="1"/>
+              <a:t>ptr</a:t>
+            </a:r>
+            <a:r>
+              <a:rPr lang="en-US" dirty="0"/>
+              <a:t> member itself is </a:t>
+            </a:r>
+            <a:r>
+              <a:rPr lang="en-US" dirty="0" err="1"/>
+              <a:t>destroyed.But</a:t>
+            </a:r>
+            <a:r>
+              <a:rPr lang="en-US" dirty="0"/>
+              <a:t> the integer allocated with new </a:t>
+            </a:r>
+            <a:r>
+              <a:rPr lang="en-US" dirty="0" err="1"/>
+              <a:t>int</a:t>
+            </a:r>
+            <a:r>
+              <a:rPr lang="en-US" dirty="0"/>
+              <a:t>(10) is not </a:t>
+            </a:r>
+            <a:r>
+              <a:rPr lang="en-US" dirty="0" err="1"/>
+              <a:t>freed.That</a:t>
+            </a:r>
+            <a:r>
+              <a:rPr lang="en-US" dirty="0"/>
+              <a:t> memory is leaked</a:t>
+            </a:r>
+            <a:r>
+              <a:rPr lang="en-US" dirty="0" smtClean="0"/>
+              <a:t>.</a:t>
+            </a:r>
+          </a:p>
+          <a:p>
+            <a:pPr marL="0" indent="0">
+              <a:buNone/>
+            </a:pPr>
+            <a:r>
+              <a:rPr lang="en-US" dirty="0" smtClean="0"/>
+              <a:t>Correct code:</a:t>
+            </a:r>
+          </a:p>
+          <a:p>
+            <a:pPr marL="0" indent="0">
+              <a:buNone/>
+            </a:pPr>
+            <a:r>
+              <a:rPr lang="en-US" dirty="0"/>
+              <a:t>~Demo() {</a:t>
+            </a:r>
+          </a:p>
+          <a:p>
+            <a:pPr marL="0" indent="0">
+              <a:buNone/>
+            </a:pPr>
+            <a:r>
+              <a:rPr lang="en-US" dirty="0"/>
+              <a:t>    delete </a:t>
+            </a:r>
+            <a:r>
+              <a:rPr lang="en-US" dirty="0" err="1"/>
+              <a:t>ptr</a:t>
             </a:r>
             <a:r>
               <a:rPr lang="en-US" dirty="0"/>
@@ -7097,15 +7022,12 @@
             </a:r>
           </a:p>
           <a:p>
-            <a:r>
-              <a:rPr lang="en-US" dirty="0"/>
-              <a:t>    }</a:t>
-            </a:r>
-          </a:p>
-          <a:p>
-            <a:r>
-              <a:rPr lang="en-US" dirty="0"/>
-              <a:t>};</a:t>
+            <a:pPr marL="0" indent="0">
+              <a:buNone/>
+            </a:pPr>
+            <a:r>
+              <a:rPr lang="en-US" dirty="0"/>
+              <a:t>}</a:t>
             </a:r>
           </a:p>
         </p:txBody>
@@ -7118,8 +7040,8 @@
         </p:nvSpPr>
         <p:spPr>
           <a:xfrm>
-            <a:off x="5930153" y="1438835"/>
-            <a:ext cx="5298142" cy="3293209"/>
+            <a:off x="431149" y="669681"/>
+            <a:ext cx="9134882" cy="923330"/>
           </a:xfrm>
           <a:prstGeom prst="rect">
             <a:avLst/>
@@ -7133,224 +7055,16 @@
           <a:lstStyle/>
           <a:p>
             <a:r>
-              <a:rPr lang="en-US" sz="1600" dirty="0" err="1">
-                <a:solidFill>
-                  <a:schemeClr val="tx2"/>
-                </a:solidFill>
-              </a:rPr>
-              <a:t>int</a:t>
-            </a:r>
-            <a:r>
-              <a:rPr lang="en-US" sz="1600" dirty="0">
-                <a:solidFill>
-                  <a:schemeClr val="tx2"/>
-                </a:solidFill>
-              </a:rPr>
-              <a:t> main() {</a:t>
-            </a:r>
-          </a:p>
-          <a:p>
-            <a:endParaRPr lang="en-US" sz="1600" dirty="0">
-              <a:solidFill>
-                <a:schemeClr val="tx2"/>
-              </a:solidFill>
-            </a:endParaRPr>
-          </a:p>
-          <a:p>
-            <a:r>
-              <a:rPr lang="en-US" sz="1600" dirty="0">
-                <a:solidFill>
-                  <a:schemeClr val="tx2"/>
-                </a:solidFill>
-              </a:rPr>
-              <a:t>  // dynamically declare Student object</a:t>
-            </a:r>
-          </a:p>
-          <a:p>
-            <a:r>
-              <a:rPr lang="en-US" sz="1600" dirty="0">
-                <a:solidFill>
-                  <a:schemeClr val="tx2"/>
-                </a:solidFill>
-              </a:rPr>
-              <a:t>  Student* </a:t>
-            </a:r>
-            <a:r>
-              <a:rPr lang="en-US" sz="1600" dirty="0" err="1">
-                <a:solidFill>
-                  <a:schemeClr val="tx2"/>
-                </a:solidFill>
-              </a:rPr>
-              <a:t>ptr</a:t>
-            </a:r>
-            <a:r>
-              <a:rPr lang="en-US" sz="1600" dirty="0">
-                <a:solidFill>
-                  <a:schemeClr val="tx2"/>
-                </a:solidFill>
-              </a:rPr>
-              <a:t> = new Student();</a:t>
-            </a:r>
-          </a:p>
-          <a:p>
-            <a:endParaRPr lang="en-US" sz="1600" dirty="0">
-              <a:solidFill>
-                <a:schemeClr val="tx2"/>
-              </a:solidFill>
-            </a:endParaRPr>
-          </a:p>
-          <a:p>
-            <a:r>
-              <a:rPr lang="en-US" sz="1600" dirty="0">
-                <a:solidFill>
-                  <a:schemeClr val="tx2"/>
-                </a:solidFill>
-              </a:rPr>
-              <a:t>  // call </a:t>
-            </a:r>
-            <a:r>
-              <a:rPr lang="en-US" sz="1600" dirty="0" err="1">
-                <a:solidFill>
-                  <a:schemeClr val="tx2"/>
-                </a:solidFill>
-              </a:rPr>
-              <a:t>getAge</a:t>
-            </a:r>
-            <a:r>
-              <a:rPr lang="en-US" sz="1600" dirty="0">
-                <a:solidFill>
-                  <a:schemeClr val="tx2"/>
-                </a:solidFill>
-              </a:rPr>
-              <a:t>() function</a:t>
-            </a:r>
-          </a:p>
-          <a:p>
-            <a:r>
-              <a:rPr lang="en-US" sz="1600" dirty="0">
-                <a:solidFill>
-                  <a:schemeClr val="tx2"/>
-                </a:solidFill>
-              </a:rPr>
-              <a:t>  </a:t>
-            </a:r>
-            <a:r>
-              <a:rPr lang="en-US" sz="1600" dirty="0" err="1">
-                <a:solidFill>
-                  <a:schemeClr val="tx2"/>
-                </a:solidFill>
-              </a:rPr>
-              <a:t>ptr</a:t>
-            </a:r>
-            <a:r>
-              <a:rPr lang="en-US" sz="1600" dirty="0">
-                <a:solidFill>
-                  <a:schemeClr val="tx2"/>
-                </a:solidFill>
-              </a:rPr>
-              <a:t>-&gt;</a:t>
-            </a:r>
-            <a:r>
-              <a:rPr lang="en-US" sz="1600" dirty="0" err="1">
-                <a:solidFill>
-                  <a:schemeClr val="tx2"/>
-                </a:solidFill>
-              </a:rPr>
-              <a:t>getAge</a:t>
-            </a:r>
-            <a:r>
-              <a:rPr lang="en-US" sz="1600" dirty="0">
-                <a:solidFill>
-                  <a:schemeClr val="tx2"/>
-                </a:solidFill>
-              </a:rPr>
-              <a:t>();</a:t>
-            </a:r>
-          </a:p>
-          <a:p>
-            <a:endParaRPr lang="en-US" sz="1600" dirty="0">
-              <a:solidFill>
-                <a:schemeClr val="tx2"/>
-              </a:solidFill>
-            </a:endParaRPr>
-          </a:p>
-          <a:p>
-            <a:r>
-              <a:rPr lang="en-US" sz="1600" dirty="0">
-                <a:solidFill>
-                  <a:schemeClr val="tx2"/>
-                </a:solidFill>
-              </a:rPr>
-              <a:t>  // </a:t>
-            </a:r>
-            <a:r>
-              <a:rPr lang="en-US" sz="1600" dirty="0" err="1">
-                <a:solidFill>
-                  <a:schemeClr val="tx2"/>
-                </a:solidFill>
-              </a:rPr>
-              <a:t>ptr</a:t>
-            </a:r>
-            <a:r>
-              <a:rPr lang="en-US" sz="1600" dirty="0">
-                <a:solidFill>
-                  <a:schemeClr val="tx2"/>
-                </a:solidFill>
-              </a:rPr>
-              <a:t> memory is released</a:t>
-            </a:r>
-          </a:p>
-          <a:p>
-            <a:r>
-              <a:rPr lang="en-US" sz="1600" dirty="0">
-                <a:solidFill>
-                  <a:schemeClr val="tx2"/>
-                </a:solidFill>
-              </a:rPr>
-              <a:t>  delete </a:t>
-            </a:r>
-            <a:r>
-              <a:rPr lang="en-US" sz="1600" dirty="0" err="1">
-                <a:solidFill>
-                  <a:schemeClr val="tx2"/>
-                </a:solidFill>
-              </a:rPr>
-              <a:t>ptr</a:t>
-            </a:r>
-            <a:r>
-              <a:rPr lang="en-US" sz="1600" dirty="0">
-                <a:solidFill>
-                  <a:schemeClr val="tx2"/>
-                </a:solidFill>
-              </a:rPr>
-              <a:t>;</a:t>
-            </a:r>
-          </a:p>
-          <a:p>
-            <a:endParaRPr lang="en-US" sz="1600" dirty="0">
-              <a:solidFill>
-                <a:schemeClr val="tx2"/>
-              </a:solidFill>
-            </a:endParaRPr>
-          </a:p>
-          <a:p>
-            <a:r>
-              <a:rPr lang="en-US" sz="1600" dirty="0">
-                <a:solidFill>
-                  <a:schemeClr val="tx2"/>
-                </a:solidFill>
-              </a:rPr>
-              <a:t>  return 0;</a:t>
-            </a:r>
-          </a:p>
-          <a:p>
-            <a:r>
-              <a:rPr lang="en-US" sz="1600" dirty="0">
-                <a:solidFill>
-                  <a:schemeClr val="tx2"/>
-                </a:solidFill>
-              </a:rPr>
-              <a:t>}</a:t>
+              <a:rPr lang="en-US" dirty="0"/>
+              <a:t>A memory leak occurs when a program allocates memory dynamically (using new, </a:t>
+            </a:r>
+            <a:r>
+              <a:rPr lang="en-US" dirty="0" err="1"/>
+              <a:t>malloc</a:t>
+            </a:r>
+            <a:r>
+              <a:rPr lang="en-US" dirty="0"/>
+              <a:t>(), etc.) but never releases it after it's no longer needed. As a result, that memory remains unavailable for reuse until the program ends.</a:t>
             </a:r>
           </a:p>
         </p:txBody>
@@ -7358,7 +7072,7 @@
     </p:spTree>
     <p:extLst>
       <p:ext uri="{BB962C8B-B14F-4D97-AF65-F5344CB8AC3E}">
-        <p14:creationId xmlns:p14="http://schemas.microsoft.com/office/powerpoint/2010/main" val="3881789860"/>
+        <p14:creationId xmlns:p14="http://schemas.microsoft.com/office/powerpoint/2010/main" val="1544871270"/>
       </p:ext>
     </p:extLst>
   </p:cSld>
@@ -7387,157 +7101,640 @@
       </p:grpSpPr>
       <p:sp>
         <p:nvSpPr>
-          <p:cNvPr id="3" name="Content Placeholder 2"/>
-          <p:cNvSpPr>
-            <a:spLocks noGrp="1"/>
-          </p:cNvSpPr>
-          <p:nvPr>
-            <p:ph idx="1"/>
+          <p:cNvPr id="2" name="Title 1"/>
+          <p:cNvSpPr>
+            <a:spLocks noGrp="1"/>
+          </p:cNvSpPr>
+          <p:nvPr>
+            <p:ph type="title"/>
           </p:nvPr>
         </p:nvSpPr>
         <p:spPr>
           <a:xfrm>
-            <a:off x="719536" y="309488"/>
-            <a:ext cx="9423269" cy="5685003"/>
+            <a:off x="439941" y="152400"/>
+            <a:ext cx="9407443" cy="823546"/>
           </a:xfrm>
         </p:spPr>
         <p:txBody>
           <a:bodyPr>
-            <a:normAutofit fontScale="92500" lnSpcReduction="20000"/>
+            <a:normAutofit fontScale="90000"/>
           </a:bodyPr>
           <a:lstStyle/>
           <a:p>
             <a:r>
-              <a:rPr lang="en-US" dirty="0"/>
-              <a:t>Output</a:t>
-            </a:r>
-          </a:p>
-          <a:p>
+              <a:rPr lang="en-US" b="1" dirty="0"/>
+              <a:t>Example 2: C++ new and delete Operator for Arrays</a:t>
+            </a:r>
+            <a:br>
+              <a:rPr lang="en-US" b="1" dirty="0"/>
+            </a:br>
             <a:endParaRPr lang="en-US" dirty="0"/>
           </a:p>
-          <a:p>
-            <a:pPr marL="0" indent="0">
-              <a:buNone/>
-            </a:pPr>
-            <a:r>
-              <a:rPr lang="en-US" dirty="0"/>
-              <a:t>Age = 12</a:t>
-            </a:r>
-          </a:p>
-          <a:p>
-            <a:r>
-              <a:rPr lang="en-US" dirty="0"/>
-              <a:t>In this program, we have created a Student class that has a private variable age.</a:t>
-            </a:r>
-          </a:p>
-          <a:p>
-            <a:endParaRPr lang="en-US" dirty="0"/>
-          </a:p>
-          <a:p>
-            <a:r>
-              <a:rPr lang="en-US" dirty="0"/>
-              <a:t>We have initialized age to 12 in the default constructor Student() and print its value with the function </a:t>
-            </a:r>
-            <a:r>
-              <a:rPr lang="en-US" dirty="0" err="1"/>
-              <a:t>getAge</a:t>
-            </a:r>
-            <a:r>
-              <a:rPr lang="en-US" dirty="0"/>
-              <a:t>().</a:t>
-            </a:r>
-          </a:p>
-          <a:p>
-            <a:endParaRPr lang="en-US" dirty="0"/>
-          </a:p>
-          <a:p>
-            <a:r>
-              <a:rPr lang="en-US" dirty="0"/>
-              <a:t>In main(), we have created a Student object using the new operator and use the pointer </a:t>
-            </a:r>
-            <a:r>
-              <a:rPr lang="en-US" dirty="0" err="1"/>
+        </p:txBody>
+      </p:sp>
+      <p:sp>
+        <p:nvSpPr>
+          <p:cNvPr id="3" name="Content Placeholder 2"/>
+          <p:cNvSpPr>
+            <a:spLocks noGrp="1"/>
+          </p:cNvSpPr>
+          <p:nvPr>
+            <p:ph idx="1"/>
+          </p:nvPr>
+        </p:nvSpPr>
+        <p:spPr>
+          <a:xfrm>
+            <a:off x="0" y="1336431"/>
+            <a:ext cx="12191999" cy="5398477"/>
+          </a:xfrm>
+        </p:spPr>
+        <p:txBody>
+          <a:bodyPr numCol="3">
+            <a:normAutofit/>
+          </a:bodyPr>
+          <a:lstStyle/>
+          <a:p>
+            <a:r>
+              <a:rPr lang="en-US" sz="2000" dirty="0"/>
+              <a:t>// C++ Program to store GPA of n number of students and display it</a:t>
+            </a:r>
+          </a:p>
+          <a:p>
+            <a:r>
+              <a:rPr lang="en-US" sz="2000" dirty="0"/>
+              <a:t>// where n is the number of students entered by the user</a:t>
+            </a:r>
+          </a:p>
+          <a:p>
+            <a:pPr marL="0" indent="0">
+              <a:buNone/>
+            </a:pPr>
+            <a:r>
+              <a:rPr lang="en-US" sz="2000" dirty="0"/>
+              <a:t>#include &lt;</a:t>
+            </a:r>
+            <a:r>
+              <a:rPr lang="en-US" sz="2000" dirty="0" err="1"/>
+              <a:t>iostream</a:t>
+            </a:r>
+            <a:r>
+              <a:rPr lang="en-US" sz="2000" dirty="0"/>
+              <a:t>&gt;</a:t>
+            </a:r>
+          </a:p>
+          <a:p>
+            <a:pPr marL="0" indent="0">
+              <a:buNone/>
+            </a:pPr>
+            <a:r>
+              <a:rPr lang="en-US" sz="2000" dirty="0"/>
+              <a:t>using namespace </a:t>
+            </a:r>
+            <a:r>
+              <a:rPr lang="en-US" sz="2000" dirty="0" err="1"/>
+              <a:t>std</a:t>
+            </a:r>
+            <a:r>
+              <a:rPr lang="en-US" sz="2000" dirty="0"/>
+              <a:t>;</a:t>
+            </a:r>
+          </a:p>
+          <a:p>
+            <a:pPr marL="0" indent="0">
+              <a:buNone/>
+            </a:pPr>
+            <a:r>
+              <a:rPr lang="en-US" sz="2000" dirty="0" err="1"/>
+              <a:t>int</a:t>
+            </a:r>
+            <a:r>
+              <a:rPr lang="en-US" sz="2000" dirty="0"/>
+              <a:t> main() </a:t>
+            </a:r>
+            <a:endParaRPr lang="en-US" sz="2000" dirty="0" smtClean="0"/>
+          </a:p>
+          <a:p>
+            <a:pPr marL="0" indent="0">
+              <a:buNone/>
+            </a:pPr>
+            <a:r>
+              <a:rPr lang="en-US" sz="2000" dirty="0" smtClean="0"/>
+              <a:t>{</a:t>
+            </a:r>
+            <a:endParaRPr lang="en-US" sz="2000" dirty="0"/>
+          </a:p>
+          <a:p>
+            <a:pPr marL="0" indent="0">
+              <a:buNone/>
+            </a:pPr>
+            <a:r>
+              <a:rPr lang="en-US" sz="2000" dirty="0"/>
+              <a:t> </a:t>
+            </a:r>
+            <a:r>
+              <a:rPr lang="en-US" sz="2000" dirty="0" err="1"/>
+              <a:t>int</a:t>
+            </a:r>
+            <a:r>
+              <a:rPr lang="en-US" sz="2000" dirty="0"/>
+              <a:t> </a:t>
+            </a:r>
+            <a:r>
+              <a:rPr lang="en-US" sz="2000" dirty="0" err="1"/>
+              <a:t>num</a:t>
+            </a:r>
+            <a:r>
+              <a:rPr lang="en-US" sz="2000" dirty="0"/>
+              <a:t>;</a:t>
+            </a:r>
+          </a:p>
+          <a:p>
+            <a:pPr marL="0" indent="0">
+              <a:buNone/>
+            </a:pPr>
+            <a:r>
+              <a:rPr lang="en-US" sz="2000" dirty="0" err="1"/>
+              <a:t>cout</a:t>
+            </a:r>
+            <a:r>
+              <a:rPr lang="en-US" sz="2000" dirty="0"/>
+              <a:t> &lt;&lt; "Enter total number of students: ";</a:t>
+            </a:r>
+          </a:p>
+          <a:p>
+            <a:pPr marL="0" indent="0">
+              <a:buNone/>
+            </a:pPr>
+            <a:r>
+              <a:rPr lang="en-US" sz="2000" dirty="0" err="1"/>
+              <a:t>cin</a:t>
+            </a:r>
+            <a:r>
+              <a:rPr lang="en-US" sz="2000" dirty="0"/>
+              <a:t> &gt;&gt; </a:t>
+            </a:r>
+            <a:r>
+              <a:rPr lang="en-US" sz="2000" dirty="0" err="1"/>
+              <a:t>num</a:t>
+            </a:r>
+            <a:r>
+              <a:rPr lang="en-US" sz="2000" dirty="0"/>
+              <a:t>;</a:t>
+            </a:r>
+          </a:p>
+          <a:p>
+            <a:pPr marL="0" indent="0">
+              <a:buNone/>
+            </a:pPr>
+            <a:r>
+              <a:rPr lang="en-US" sz="2000" dirty="0"/>
+              <a:t>float* </a:t>
+            </a:r>
+            <a:r>
+              <a:rPr lang="en-US" sz="2000" dirty="0" err="1"/>
               <a:t>ptr</a:t>
             </a:r>
             <a:r>
-              <a:rPr lang="en-US" dirty="0"/>
-              <a:t> to point to its address.</a:t>
-            </a:r>
-          </a:p>
-          <a:p>
-            <a:endParaRPr lang="en-US" dirty="0"/>
-          </a:p>
-          <a:p>
-            <a:r>
-              <a:rPr lang="en-US" dirty="0"/>
-              <a:t>The moment the object is created, the Student() constructor initializes age to 12.</a:t>
-            </a:r>
-          </a:p>
-          <a:p>
-            <a:endParaRPr lang="en-US" dirty="0"/>
-          </a:p>
-          <a:p>
-            <a:r>
-              <a:rPr lang="en-US" dirty="0"/>
-              <a:t>We then call the </a:t>
-            </a:r>
-            <a:r>
-              <a:rPr lang="en-US" dirty="0" err="1"/>
-              <a:t>getAge</a:t>
-            </a:r>
-            <a:r>
-              <a:rPr lang="en-US" dirty="0"/>
-              <a:t>() function using the code:</a:t>
-            </a:r>
-          </a:p>
-          <a:p>
-            <a:endParaRPr lang="en-US" dirty="0"/>
-          </a:p>
-          <a:p>
-            <a:pPr marL="0" indent="0">
-              <a:buNone/>
-            </a:pPr>
-            <a:r>
-              <a:rPr lang="en-US" dirty="0" err="1"/>
+              <a:rPr lang="en-US" sz="2000" dirty="0"/>
+              <a:t>; </a:t>
+            </a:r>
+          </a:p>
+          <a:p>
+            <a:pPr marL="0" indent="0">
+              <a:buNone/>
+            </a:pPr>
+            <a:r>
+              <a:rPr lang="en-US" sz="2000" dirty="0"/>
+              <a:t>// memory allocation of </a:t>
+            </a:r>
+            <a:r>
+              <a:rPr lang="en-US" sz="2000" dirty="0" err="1"/>
+              <a:t>num</a:t>
+            </a:r>
+            <a:r>
+              <a:rPr lang="en-US" sz="2000" dirty="0"/>
+              <a:t> number of floats</a:t>
+            </a:r>
+          </a:p>
+          <a:p>
+            <a:pPr marL="0" indent="0">
+              <a:buNone/>
+            </a:pPr>
+            <a:r>
+              <a:rPr lang="en-US" sz="2000" dirty="0"/>
+              <a:t> </a:t>
+            </a:r>
+            <a:r>
+              <a:rPr lang="en-US" sz="2000" dirty="0" err="1"/>
               <a:t>ptr</a:t>
             </a:r>
             <a:r>
-              <a:rPr lang="en-US" dirty="0"/>
-              <a:t>-&gt;</a:t>
-            </a:r>
-            <a:r>
-              <a:rPr lang="en-US" dirty="0" err="1"/>
-              <a:t>getAge</a:t>
-            </a:r>
-            <a:r>
-              <a:rPr lang="en-US" dirty="0"/>
-              <a:t>();</a:t>
-            </a:r>
-          </a:p>
-          <a:p>
-            <a:r>
-              <a:rPr lang="en-US" dirty="0"/>
-              <a:t>Notice the arrow operator -&gt;. This operator is used to access class members using pointers.</a:t>
-            </a:r>
-          </a:p>
-          <a:p>
-            <a:endParaRPr lang="en-US" dirty="0"/>
-          </a:p>
-          <a:p>
-            <a:endParaRPr lang="en-US" dirty="0"/>
+              <a:rPr lang="en-US" sz="2000" dirty="0"/>
+              <a:t> = new float[</a:t>
+            </a:r>
+            <a:r>
+              <a:rPr lang="en-US" sz="2000" dirty="0" err="1"/>
+              <a:t>num</a:t>
+            </a:r>
+            <a:r>
+              <a:rPr lang="en-US" sz="2000" dirty="0"/>
+              <a:t>];</a:t>
+            </a:r>
+          </a:p>
+          <a:p>
+            <a:pPr marL="0" indent="0">
+              <a:buNone/>
+            </a:pPr>
+            <a:r>
+              <a:rPr lang="en-US" sz="2000" dirty="0" err="1"/>
+              <a:t>cout</a:t>
+            </a:r>
+            <a:r>
+              <a:rPr lang="en-US" sz="2000" dirty="0"/>
+              <a:t> &lt;&lt; "Enter GPA of students." </a:t>
+            </a:r>
+            <a:endParaRPr lang="en-US" sz="2000" dirty="0" smtClean="0"/>
+          </a:p>
+          <a:p>
+            <a:pPr marL="0" indent="0">
+              <a:buNone/>
+            </a:pPr>
+            <a:r>
+              <a:rPr lang="en-US" sz="2000" dirty="0" smtClean="0"/>
+              <a:t>&lt;&lt; </a:t>
+            </a:r>
+            <a:r>
+              <a:rPr lang="en-US" sz="2000" dirty="0" err="1"/>
+              <a:t>endl</a:t>
+            </a:r>
+            <a:r>
+              <a:rPr lang="en-US" sz="2000" dirty="0"/>
+              <a:t>;</a:t>
+            </a:r>
+          </a:p>
+          <a:p>
+            <a:pPr marL="0" indent="0">
+              <a:buNone/>
+            </a:pPr>
+            <a:r>
+              <a:rPr lang="en-US" sz="2000" dirty="0"/>
+              <a:t> for (</a:t>
+            </a:r>
+            <a:r>
+              <a:rPr lang="en-US" sz="2000" dirty="0" err="1"/>
+              <a:t>int</a:t>
+            </a:r>
+            <a:r>
+              <a:rPr lang="en-US" sz="2000" dirty="0"/>
+              <a:t> </a:t>
+            </a:r>
+            <a:r>
+              <a:rPr lang="en-US" sz="2000" dirty="0" err="1"/>
+              <a:t>i</a:t>
+            </a:r>
+            <a:r>
+              <a:rPr lang="en-US" sz="2000" dirty="0"/>
+              <a:t> = 0; </a:t>
+            </a:r>
+            <a:r>
+              <a:rPr lang="en-US" sz="2000" dirty="0" err="1"/>
+              <a:t>i</a:t>
+            </a:r>
+            <a:r>
+              <a:rPr lang="en-US" sz="2000" dirty="0"/>
+              <a:t> &lt; </a:t>
+            </a:r>
+            <a:r>
+              <a:rPr lang="en-US" sz="2000" dirty="0" err="1"/>
+              <a:t>num</a:t>
+            </a:r>
+            <a:r>
+              <a:rPr lang="en-US" sz="2000" dirty="0"/>
+              <a:t>; ++</a:t>
+            </a:r>
+            <a:r>
+              <a:rPr lang="en-US" sz="2000" dirty="0" err="1"/>
+              <a:t>i</a:t>
+            </a:r>
+            <a:r>
+              <a:rPr lang="en-US" sz="2000" dirty="0"/>
+              <a:t>) </a:t>
+            </a:r>
+            <a:endParaRPr lang="en-US" sz="2000" dirty="0" smtClean="0"/>
+          </a:p>
+          <a:p>
+            <a:pPr marL="0" indent="0">
+              <a:buNone/>
+            </a:pPr>
+            <a:r>
+              <a:rPr lang="en-US" sz="2000" dirty="0" smtClean="0"/>
+              <a:t>{</a:t>
+            </a:r>
+            <a:endParaRPr lang="en-US" sz="2000" dirty="0"/>
+          </a:p>
+          <a:p>
+            <a:pPr marL="0" indent="0">
+              <a:buNone/>
+            </a:pPr>
+            <a:r>
+              <a:rPr lang="en-US" sz="2000" dirty="0"/>
+              <a:t>   </a:t>
+            </a:r>
+            <a:r>
+              <a:rPr lang="en-US" sz="2000" dirty="0" err="1"/>
+              <a:t>cout</a:t>
+            </a:r>
+            <a:r>
+              <a:rPr lang="en-US" sz="2000" dirty="0"/>
+              <a:t> &lt;&lt; "Student" &lt;&lt; </a:t>
+            </a:r>
+            <a:r>
+              <a:rPr lang="en-US" sz="2000" dirty="0" err="1"/>
+              <a:t>i</a:t>
+            </a:r>
+            <a:r>
+              <a:rPr lang="en-US" sz="2000" dirty="0"/>
+              <a:t> + 1 &lt;&lt; ": ";</a:t>
+            </a:r>
+          </a:p>
+          <a:p>
+            <a:pPr marL="0" indent="0">
+              <a:buNone/>
+            </a:pPr>
+            <a:r>
+              <a:rPr lang="en-US" sz="2000" dirty="0"/>
+              <a:t>    </a:t>
+            </a:r>
+            <a:r>
+              <a:rPr lang="en-US" sz="2000" dirty="0" err="1"/>
+              <a:t>cin</a:t>
+            </a:r>
+            <a:r>
+              <a:rPr lang="en-US" sz="2000" dirty="0"/>
+              <a:t> &gt;&gt; *(</a:t>
+            </a:r>
+            <a:r>
+              <a:rPr lang="en-US" sz="2000" dirty="0" err="1"/>
+              <a:t>ptr</a:t>
+            </a:r>
+            <a:r>
+              <a:rPr lang="en-US" sz="2000" dirty="0"/>
+              <a:t> + </a:t>
+            </a:r>
+            <a:r>
+              <a:rPr lang="en-US" sz="2000" dirty="0" err="1"/>
+              <a:t>i</a:t>
+            </a:r>
+            <a:r>
+              <a:rPr lang="en-US" sz="2000" dirty="0"/>
+              <a:t>);</a:t>
+            </a:r>
+          </a:p>
+          <a:p>
+            <a:pPr marL="0" indent="0">
+              <a:buNone/>
+            </a:pPr>
+            <a:r>
+              <a:rPr lang="en-US" sz="2000" dirty="0"/>
+              <a:t>  }</a:t>
+            </a:r>
+          </a:p>
+          <a:p>
+            <a:pPr marL="0" indent="0">
+              <a:buNone/>
+            </a:pPr>
+            <a:r>
+              <a:rPr lang="en-US" sz="2000" dirty="0" smtClean="0"/>
+              <a:t>}</a:t>
+            </a:r>
+          </a:p>
+          <a:p>
+            <a:pPr marL="0" indent="0">
+              <a:buNone/>
+            </a:pPr>
+            <a:r>
+              <a:rPr lang="en-US" sz="2000" dirty="0" err="1"/>
+              <a:t>cout</a:t>
+            </a:r>
+            <a:r>
+              <a:rPr lang="en-US" sz="2000" dirty="0"/>
+              <a:t> &lt;&lt; "\</a:t>
+            </a:r>
+            <a:r>
+              <a:rPr lang="en-US" sz="2000" dirty="0" err="1"/>
+              <a:t>nDisplaying</a:t>
+            </a:r>
+            <a:r>
+              <a:rPr lang="en-US" sz="2000" dirty="0"/>
+              <a:t> GPA of students." &lt;&lt; </a:t>
+            </a:r>
+            <a:r>
+              <a:rPr lang="en-US" sz="2000" dirty="0" err="1"/>
+              <a:t>endl</a:t>
+            </a:r>
+            <a:r>
+              <a:rPr lang="en-US" sz="2000" dirty="0"/>
+              <a:t>;</a:t>
+            </a:r>
+          </a:p>
+          <a:p>
+            <a:pPr marL="0" indent="0">
+              <a:buNone/>
+            </a:pPr>
+            <a:endParaRPr lang="en-US" sz="2000" dirty="0"/>
+          </a:p>
+          <a:p>
+            <a:pPr marL="0" indent="0">
+              <a:buNone/>
+            </a:pPr>
+            <a:r>
+              <a:rPr lang="en-US" sz="2000" dirty="0"/>
+              <a:t>for (</a:t>
+            </a:r>
+            <a:r>
+              <a:rPr lang="en-US" sz="2000" dirty="0" err="1"/>
+              <a:t>int</a:t>
+            </a:r>
+            <a:r>
+              <a:rPr lang="en-US" sz="2000" dirty="0"/>
+              <a:t> </a:t>
+            </a:r>
+            <a:r>
+              <a:rPr lang="en-US" sz="2000" dirty="0" err="1"/>
+              <a:t>i</a:t>
+            </a:r>
+            <a:r>
+              <a:rPr lang="en-US" sz="2000" dirty="0"/>
+              <a:t> = 0; </a:t>
+            </a:r>
+            <a:r>
+              <a:rPr lang="en-US" sz="2000" dirty="0" err="1"/>
+              <a:t>i</a:t>
+            </a:r>
+            <a:r>
+              <a:rPr lang="en-US" sz="2000" dirty="0"/>
+              <a:t> &lt; </a:t>
+            </a:r>
+            <a:r>
+              <a:rPr lang="en-US" sz="2000" dirty="0" err="1"/>
+              <a:t>num</a:t>
+            </a:r>
+            <a:r>
+              <a:rPr lang="en-US" sz="2000" dirty="0"/>
+              <a:t>; ++</a:t>
+            </a:r>
+            <a:r>
+              <a:rPr lang="en-US" sz="2000" dirty="0" err="1"/>
+              <a:t>i</a:t>
+            </a:r>
+            <a:r>
+              <a:rPr lang="en-US" sz="2000" dirty="0"/>
+              <a:t>) </a:t>
+            </a:r>
+            <a:endParaRPr lang="en-US" sz="2000" dirty="0" smtClean="0"/>
+          </a:p>
+          <a:p>
+            <a:pPr marL="0" indent="0">
+              <a:buNone/>
+            </a:pPr>
+            <a:r>
+              <a:rPr lang="en-US" sz="2000" dirty="0" smtClean="0"/>
+              <a:t>{</a:t>
+            </a:r>
+            <a:endParaRPr lang="en-US" sz="2000" dirty="0"/>
+          </a:p>
+          <a:p>
+            <a:pPr marL="0" indent="0">
+              <a:buNone/>
+            </a:pPr>
+            <a:r>
+              <a:rPr lang="en-US" sz="2000" dirty="0"/>
+              <a:t>    </a:t>
+            </a:r>
+            <a:r>
+              <a:rPr lang="en-US" sz="2000" dirty="0" err="1"/>
+              <a:t>cout</a:t>
+            </a:r>
+            <a:r>
+              <a:rPr lang="en-US" sz="2000" dirty="0"/>
+              <a:t> &lt;&lt; "Student" &lt;&lt; </a:t>
+            </a:r>
+            <a:r>
+              <a:rPr lang="en-US" sz="2000" dirty="0" err="1"/>
+              <a:t>i</a:t>
+            </a:r>
+            <a:r>
+              <a:rPr lang="en-US" sz="2000" dirty="0"/>
+              <a:t> + 1 &lt;&lt; ": " &lt;&lt; *(</a:t>
+            </a:r>
+            <a:r>
+              <a:rPr lang="en-US" sz="2000" dirty="0" err="1"/>
+              <a:t>ptr</a:t>
+            </a:r>
+            <a:r>
+              <a:rPr lang="en-US" sz="2000" dirty="0"/>
+              <a:t> + </a:t>
+            </a:r>
+            <a:r>
+              <a:rPr lang="en-US" sz="2000" dirty="0" err="1"/>
+              <a:t>i</a:t>
+            </a:r>
+            <a:r>
+              <a:rPr lang="en-US" sz="2000" dirty="0"/>
+              <a:t>) &lt;&lt; </a:t>
+            </a:r>
+            <a:r>
+              <a:rPr lang="en-US" sz="2000" dirty="0" err="1"/>
+              <a:t>endl</a:t>
+            </a:r>
+            <a:r>
+              <a:rPr lang="en-US" sz="2000" dirty="0"/>
+              <a:t>;</a:t>
+            </a:r>
+          </a:p>
+          <a:p>
+            <a:pPr marL="0" indent="0">
+              <a:buNone/>
+            </a:pPr>
+            <a:r>
+              <a:rPr lang="en-US" sz="2000" dirty="0"/>
+              <a:t>}</a:t>
+            </a:r>
+          </a:p>
+          <a:p>
+            <a:pPr marL="0" indent="0">
+              <a:buNone/>
+            </a:pPr>
+            <a:r>
+              <a:rPr lang="en-US" sz="2000" dirty="0"/>
+              <a:t>// </a:t>
+            </a:r>
+            <a:r>
+              <a:rPr lang="en-US" sz="2000" dirty="0" err="1"/>
+              <a:t>ptr</a:t>
+            </a:r>
+            <a:r>
+              <a:rPr lang="en-US" sz="2000" dirty="0"/>
+              <a:t> memory is released</a:t>
+            </a:r>
+          </a:p>
+          <a:p>
+            <a:pPr marL="0" indent="0">
+              <a:buNone/>
+            </a:pPr>
+            <a:r>
+              <a:rPr lang="en-US" sz="2000" dirty="0"/>
+              <a:t> delete[] </a:t>
+            </a:r>
+            <a:r>
+              <a:rPr lang="en-US" sz="2000" dirty="0" err="1"/>
+              <a:t>ptr</a:t>
+            </a:r>
+            <a:r>
+              <a:rPr lang="en-US" sz="2000" dirty="0"/>
+              <a:t>;</a:t>
+            </a:r>
+          </a:p>
+          <a:p>
+            <a:pPr marL="0" indent="0">
+              <a:buNone/>
+            </a:pPr>
+            <a:r>
+              <a:rPr lang="en-US" sz="2000" dirty="0"/>
+              <a:t> return 0;</a:t>
+            </a:r>
+          </a:p>
+          <a:p>
+            <a:pPr marL="0" indent="0">
+              <a:buNone/>
+            </a:pPr>
+            <a:r>
+              <a:rPr lang="en-US" sz="2000" dirty="0"/>
+              <a:t>}</a:t>
+            </a:r>
+          </a:p>
+          <a:p>
+            <a:endParaRPr lang="en-US" sz="2000" dirty="0"/>
           </a:p>
         </p:txBody>
       </p:sp>
     </p:spTree>
     <p:extLst>
       <p:ext uri="{BB962C8B-B14F-4D97-AF65-F5344CB8AC3E}">
-        <p14:creationId xmlns:p14="http://schemas.microsoft.com/office/powerpoint/2010/main" val="3537471962"/>
+        <p14:creationId xmlns:p14="http://schemas.microsoft.com/office/powerpoint/2010/main" val="4169546226"/>
       </p:ext>
     </p:extLst>
   </p:cSld>
   <p:clrMapOvr>
     <a:masterClrMapping/>
   </p:clrMapOvr>
+  <p:timing>
+    <p:tnLst>
+      <p:par>
+        <p:cTn id="1" dur="indefinite" restart="never" nodeType="tmRoot"/>
+      </p:par>
+    </p:tnLst>
+  </p:timing>
 </p:sld>
 </file>
 
@@ -7560,13 +7757,26 @@
       </p:grpSpPr>
       <p:sp>
         <p:nvSpPr>
-          <p:cNvPr id="3" name="Content Placeholder 2">
-            <a:extLst>
-              <a:ext uri="{FF2B5EF4-FFF2-40B4-BE49-F238E27FC236}">
-                <a16:creationId xmlns:a16="http://schemas.microsoft.com/office/drawing/2014/main" id="{E0AAFEAE-0ACF-0452-A798-688124AFECCF}"/>
-              </a:ext>
-            </a:extLst>
-          </p:cNvPr>
+          <p:cNvPr id="2" name="Title 1"/>
+          <p:cNvSpPr>
+            <a:spLocks noGrp="1"/>
+          </p:cNvSpPr>
+          <p:nvPr>
+            <p:ph type="title"/>
+          </p:nvPr>
+        </p:nvSpPr>
+        <p:spPr/>
+        <p:txBody>
+          <a:bodyPr/>
+          <a:lstStyle/>
+          <a:p>
+            <a:endParaRPr lang="en-US"/>
+          </a:p>
+        </p:txBody>
+      </p:sp>
+      <p:sp>
+        <p:nvSpPr>
+          <p:cNvPr id="3" name="Content Placeholder 2"/>
           <p:cNvSpPr>
             <a:spLocks noGrp="1"/>
           </p:cNvSpPr>
@@ -7576,13 +7786,13 @@
         </p:nvSpPr>
         <p:spPr>
           <a:xfrm>
-            <a:off x="0" y="168813"/>
-            <a:ext cx="12192000" cy="6689188"/>
+            <a:off x="677334" y="1277471"/>
+            <a:ext cx="8596668" cy="4763892"/>
           </a:xfrm>
         </p:spPr>
         <p:txBody>
-          <a:bodyPr numCol="3">
-            <a:normAutofit/>
+          <a:bodyPr>
+            <a:normAutofit fontScale="92500" lnSpcReduction="10000"/>
           </a:bodyPr>
           <a:lstStyle/>
           <a:p>
@@ -7591,22 +7801,10 @@
             </a:pPr>
             <a:r>
               <a:rPr lang="en-US" dirty="0"/>
-              <a:t>#include &lt;iostream&gt;</a:t>
-            </a:r>
-          </a:p>
-          <a:p>
-            <a:pPr marL="0" indent="0">
-              <a:buNone/>
-            </a:pPr>
-            <a:r>
-              <a:rPr lang="en-US" dirty="0"/>
-              <a:t>using namespace std;</a:t>
-            </a:r>
-          </a:p>
-          <a:p>
-            <a:pPr marL="0" indent="0">
-              <a:buNone/>
-            </a:pPr>
+              <a:t>Output</a:t>
+            </a:r>
+          </a:p>
+          <a:p>
             <a:endParaRPr lang="en-US" dirty="0"/>
           </a:p>
           <a:p>
@@ -7615,566 +7813,97 @@
             </a:pPr>
             <a:r>
               <a:rPr lang="en-US" dirty="0"/>
-              <a:t>class Student {</a:t>
-            </a:r>
-          </a:p>
-          <a:p>
-            <a:pPr marL="0" indent="0">
-              <a:buNone/>
-            </a:pPr>
-            <a:r>
-              <a:rPr lang="en-US" dirty="0"/>
-              <a:t>private:</a:t>
-            </a:r>
-          </a:p>
-          <a:p>
-            <a:pPr marL="0" indent="0">
-              <a:buNone/>
-            </a:pPr>
-            <a:r>
-              <a:rPr lang="en-US" dirty="0"/>
-              <a:t>    string name;</a:t>
-            </a:r>
-          </a:p>
-          <a:p>
-            <a:pPr marL="0" indent="0">
-              <a:buNone/>
-            </a:pPr>
-            <a:r>
-              <a:rPr lang="en-US" dirty="0"/>
-              <a:t>    int age;</a:t>
-            </a:r>
-          </a:p>
-          <a:p>
-            <a:pPr marL="0" indent="0">
-              <a:buNone/>
-            </a:pPr>
-            <a:endParaRPr lang="en-US" dirty="0"/>
-          </a:p>
-          <a:p>
-            <a:pPr marL="0" indent="0">
-              <a:buNone/>
-            </a:pPr>
-            <a:r>
-              <a:rPr lang="en-US" dirty="0"/>
-              <a:t>public:</a:t>
-            </a:r>
-          </a:p>
-          <a:p>
-            <a:pPr marL="0" indent="0">
-              <a:buNone/>
-            </a:pPr>
-            <a:r>
-              <a:rPr lang="en-US" dirty="0"/>
-              <a:t>void input() {</a:t>
-            </a:r>
-          </a:p>
-          <a:p>
-            <a:pPr marL="0" indent="0">
-              <a:buNone/>
-            </a:pPr>
-            <a:r>
-              <a:rPr lang="en-US" dirty="0"/>
-              <a:t>        </a:t>
-            </a:r>
-            <a:r>
-              <a:rPr lang="en-US" dirty="0" err="1"/>
-              <a:t>cout</a:t>
-            </a:r>
-            <a:r>
-              <a:rPr lang="en-US" dirty="0"/>
-              <a:t> &lt;&lt; "Enter Name: ";</a:t>
-            </a:r>
-          </a:p>
-          <a:p>
-            <a:pPr marL="0" indent="0">
-              <a:buNone/>
-            </a:pPr>
-            <a:r>
-              <a:rPr lang="en-US" dirty="0"/>
-              <a:t>        </a:t>
-            </a:r>
-            <a:r>
-              <a:rPr lang="en-US" dirty="0" err="1"/>
-              <a:t>cin</a:t>
-            </a:r>
-            <a:r>
-              <a:rPr lang="en-US" dirty="0"/>
-              <a:t> &gt;&gt; name;</a:t>
-            </a:r>
-          </a:p>
-          <a:p>
-            <a:pPr marL="0" indent="0">
-              <a:buNone/>
-            </a:pPr>
-            <a:endParaRPr lang="en-US" dirty="0"/>
-          </a:p>
-          <a:p>
-            <a:pPr marL="0" indent="0">
-              <a:buNone/>
-            </a:pPr>
-            <a:r>
-              <a:rPr lang="en-US" dirty="0"/>
-              <a:t>        </a:t>
-            </a:r>
-            <a:r>
-              <a:rPr lang="en-US" dirty="0" err="1"/>
-              <a:t>cout</a:t>
-            </a:r>
-            <a:r>
-              <a:rPr lang="en-US" dirty="0"/>
-              <a:t> &lt;&lt; "Enter Age: ";</a:t>
-            </a:r>
-          </a:p>
-          <a:p>
-            <a:pPr marL="0" indent="0">
-              <a:buNone/>
-            </a:pPr>
-            <a:r>
-              <a:rPr lang="en-US" dirty="0"/>
-              <a:t>        </a:t>
-            </a:r>
-            <a:r>
-              <a:rPr lang="en-US" dirty="0" err="1"/>
-              <a:t>cin</a:t>
-            </a:r>
-            <a:r>
-              <a:rPr lang="en-US" dirty="0"/>
-              <a:t> &gt;&gt; age;</a:t>
-            </a:r>
-          </a:p>
-          <a:p>
-            <a:pPr marL="0" indent="0">
-              <a:buNone/>
-            </a:pPr>
-            <a:r>
-              <a:rPr lang="en-US" dirty="0"/>
-              <a:t>    }</a:t>
-            </a:r>
-          </a:p>
-          <a:p>
-            <a:pPr marL="0" indent="0">
-              <a:buNone/>
-            </a:pPr>
-            <a:r>
-              <a:rPr lang="en-US" dirty="0"/>
-              <a:t>void display() {</a:t>
-            </a:r>
-          </a:p>
-          <a:p>
-            <a:pPr marL="0" indent="0">
-              <a:buNone/>
-            </a:pPr>
-            <a:r>
-              <a:rPr lang="en-US" dirty="0"/>
-              <a:t>        </a:t>
-            </a:r>
-            <a:r>
-              <a:rPr lang="en-US" dirty="0" err="1"/>
-              <a:t>cout</a:t>
-            </a:r>
-            <a:r>
-              <a:rPr lang="en-US" dirty="0"/>
-              <a:t> &lt;&lt; "Name: " &lt;&lt; name &lt;&lt; </a:t>
-            </a:r>
-            <a:r>
-              <a:rPr lang="en-US" dirty="0" err="1"/>
-              <a:t>endl</a:t>
-            </a:r>
-            <a:r>
-              <a:rPr lang="en-US" dirty="0"/>
-              <a:t>;</a:t>
-            </a:r>
-          </a:p>
-          <a:p>
-            <a:pPr marL="0" indent="0">
-              <a:buNone/>
-            </a:pPr>
-            <a:r>
-              <a:rPr lang="en-US" dirty="0"/>
-              <a:t>        </a:t>
-            </a:r>
-            <a:r>
-              <a:rPr lang="en-US" dirty="0" err="1"/>
-              <a:t>cout</a:t>
-            </a:r>
-            <a:r>
-              <a:rPr lang="en-US" dirty="0"/>
-              <a:t> &lt;&lt; "Age: " &lt;&lt; age &lt;&lt; </a:t>
-            </a:r>
-            <a:r>
-              <a:rPr lang="en-US" dirty="0" err="1"/>
-              <a:t>endl</a:t>
-            </a:r>
-            <a:r>
-              <a:rPr lang="en-US" dirty="0"/>
-              <a:t>;</a:t>
-            </a:r>
-          </a:p>
-          <a:p>
-            <a:pPr marL="0" indent="0">
-              <a:buNone/>
-            </a:pPr>
-            <a:r>
-              <a:rPr lang="en-US" dirty="0"/>
-              <a:t>    }</a:t>
-            </a:r>
-          </a:p>
-          <a:p>
-            <a:pPr marL="0" indent="0">
-              <a:buNone/>
-            </a:pPr>
-            <a:r>
-              <a:rPr lang="en-US" dirty="0"/>
-              <a:t>};</a:t>
-            </a:r>
-          </a:p>
-          <a:p>
-            <a:pPr marL="0" indent="0">
-              <a:buNone/>
-            </a:pPr>
-            <a:endParaRPr lang="en-US" dirty="0"/>
-          </a:p>
-          <a:p>
-            <a:pPr marL="0" indent="0">
-              <a:buNone/>
-            </a:pPr>
-            <a:r>
-              <a:rPr lang="en-US" dirty="0"/>
-              <a:t>int main() {</a:t>
-            </a:r>
-          </a:p>
-          <a:p>
-            <a:pPr marL="0" indent="0">
-              <a:buNone/>
-            </a:pPr>
-            <a:r>
-              <a:rPr lang="en-US" dirty="0"/>
-              <a:t>    int n;</a:t>
-            </a:r>
-          </a:p>
-          <a:p>
-            <a:pPr marL="0" indent="0">
-              <a:buNone/>
-            </a:pPr>
-            <a:r>
-              <a:rPr lang="en-US" dirty="0"/>
-              <a:t>  </a:t>
-            </a:r>
-            <a:r>
-              <a:rPr lang="en-US" dirty="0" err="1"/>
-              <a:t>cout</a:t>
-            </a:r>
-            <a:r>
-              <a:rPr lang="en-US" dirty="0"/>
-              <a:t> &lt;&lt; "Enter number of students: ";   </a:t>
-            </a:r>
-          </a:p>
-          <a:p>
-            <a:pPr marL="0" indent="0">
-              <a:buNone/>
-            </a:pPr>
-            <a:r>
-              <a:rPr lang="en-US" dirty="0"/>
-              <a:t>    </a:t>
-            </a:r>
-            <a:r>
-              <a:rPr lang="en-US" dirty="0" err="1"/>
-              <a:t>cin</a:t>
-            </a:r>
-            <a:r>
-              <a:rPr lang="en-US" dirty="0"/>
-              <a:t> &gt;&gt; n;</a:t>
-            </a:r>
-          </a:p>
-          <a:p>
-            <a:pPr marL="0" indent="0">
-              <a:buNone/>
-            </a:pPr>
-            <a:r>
-              <a:rPr lang="en-US" dirty="0"/>
-              <a:t>Student* s = new Student[n];</a:t>
-            </a:r>
-          </a:p>
-          <a:p>
-            <a:pPr marL="0" indent="0">
-              <a:buNone/>
-            </a:pPr>
-            <a:r>
-              <a:rPr lang="en-US" dirty="0" err="1"/>
-              <a:t>cout</a:t>
-            </a:r>
-            <a:r>
-              <a:rPr lang="en-US" dirty="0"/>
-              <a:t> &lt;&lt; "\</a:t>
-            </a:r>
-            <a:r>
-              <a:rPr lang="en-US" dirty="0" err="1"/>
-              <a:t>nEnter</a:t>
-            </a:r>
-            <a:r>
-              <a:rPr lang="en-US" dirty="0"/>
-              <a:t> Student Information:\n";</a:t>
-            </a:r>
-          </a:p>
-          <a:p>
-            <a:pPr marL="0" indent="0">
-              <a:buNone/>
-            </a:pPr>
-            <a:r>
-              <a:rPr lang="en-US" dirty="0"/>
-              <a:t>    for (int </a:t>
-            </a:r>
-            <a:r>
-              <a:rPr lang="en-US" dirty="0" err="1"/>
-              <a:t>i</a:t>
-            </a:r>
-            <a:r>
-              <a:rPr lang="en-US" dirty="0"/>
-              <a:t> = 0; </a:t>
-            </a:r>
-            <a:r>
-              <a:rPr lang="en-US" dirty="0" err="1"/>
-              <a:t>i</a:t>
-            </a:r>
-            <a:r>
-              <a:rPr lang="en-US" dirty="0"/>
-              <a:t> &lt; n; </a:t>
-            </a:r>
-            <a:r>
-              <a:rPr lang="en-US" dirty="0" err="1"/>
-              <a:t>i</a:t>
-            </a:r>
-            <a:r>
-              <a:rPr lang="en-US" dirty="0"/>
-              <a:t>++) {</a:t>
-            </a:r>
-          </a:p>
-          <a:p>
-            <a:pPr marL="0" indent="0">
-              <a:buNone/>
-            </a:pPr>
-            <a:r>
-              <a:rPr lang="en-US" dirty="0"/>
-              <a:t>        </a:t>
-            </a:r>
-            <a:r>
-              <a:rPr lang="en-US" dirty="0" err="1"/>
-              <a:t>cout</a:t>
-            </a:r>
-            <a:r>
-              <a:rPr lang="en-US" dirty="0"/>
-              <a:t> &lt;&lt; "\</a:t>
-            </a:r>
-            <a:r>
-              <a:rPr lang="en-US" dirty="0" err="1"/>
-              <a:t>nStudent</a:t>
-            </a:r>
-            <a:r>
-              <a:rPr lang="en-US" dirty="0"/>
-              <a:t> " &lt;&lt; </a:t>
-            </a:r>
-            <a:r>
-              <a:rPr lang="en-US" dirty="0" err="1"/>
-              <a:t>i</a:t>
-            </a:r>
-            <a:r>
-              <a:rPr lang="en-US" dirty="0"/>
-              <a:t> + 1 &lt;&lt; </a:t>
-            </a:r>
-            <a:r>
-              <a:rPr lang="en-US" dirty="0" err="1"/>
-              <a:t>endl</a:t>
-            </a:r>
-            <a:r>
-              <a:rPr lang="en-US" dirty="0"/>
-              <a:t>;</a:t>
-            </a:r>
-          </a:p>
-          <a:p>
-            <a:pPr marL="0" indent="0">
-              <a:buNone/>
-            </a:pPr>
-            <a:r>
-              <a:rPr lang="en-US" dirty="0"/>
-              <a:t>        s[</a:t>
-            </a:r>
-            <a:r>
-              <a:rPr lang="en-US" dirty="0" err="1"/>
-              <a:t>i</a:t>
-            </a:r>
-            <a:r>
-              <a:rPr lang="en-US" dirty="0"/>
-              <a:t>].input();</a:t>
-            </a:r>
-          </a:p>
-          <a:p>
-            <a:pPr marL="0" indent="0">
-              <a:buNone/>
-            </a:pPr>
-            <a:r>
-              <a:rPr lang="en-US" dirty="0"/>
-              <a:t>    }</a:t>
-            </a:r>
-          </a:p>
-          <a:p>
-            <a:pPr marL="0" indent="0">
-              <a:buNone/>
-            </a:pPr>
-            <a:r>
-              <a:rPr lang="en-US" dirty="0" err="1"/>
-              <a:t>cout</a:t>
-            </a:r>
-            <a:r>
-              <a:rPr lang="en-US" dirty="0"/>
-              <a:t> &lt;&lt; "\</a:t>
-            </a:r>
-            <a:r>
-              <a:rPr lang="en-US" dirty="0" err="1"/>
-              <a:t>nStudent</a:t>
-            </a:r>
-            <a:r>
-              <a:rPr lang="en-US" dirty="0"/>
-              <a:t> Details:\n";</a:t>
-            </a:r>
-          </a:p>
-          <a:p>
-            <a:pPr marL="0" indent="0">
-              <a:buNone/>
-            </a:pPr>
-            <a:r>
-              <a:rPr lang="en-US" dirty="0"/>
-              <a:t>    for (int </a:t>
-            </a:r>
-            <a:r>
-              <a:rPr lang="en-US" dirty="0" err="1"/>
-              <a:t>i</a:t>
-            </a:r>
-            <a:r>
-              <a:rPr lang="en-US" dirty="0"/>
-              <a:t> = 0; </a:t>
-            </a:r>
-            <a:r>
-              <a:rPr lang="en-US" dirty="0" err="1"/>
-              <a:t>i</a:t>
-            </a:r>
-            <a:r>
-              <a:rPr lang="en-US" dirty="0"/>
-              <a:t> &lt; n; </a:t>
-            </a:r>
-            <a:r>
-              <a:rPr lang="en-US" dirty="0" err="1"/>
-              <a:t>i</a:t>
-            </a:r>
-            <a:r>
-              <a:rPr lang="en-US" dirty="0"/>
-              <a:t>++) {</a:t>
-            </a:r>
-          </a:p>
-          <a:p>
-            <a:pPr marL="0" indent="0">
-              <a:buNone/>
-            </a:pPr>
-            <a:r>
-              <a:rPr lang="en-US" dirty="0"/>
-              <a:t>        </a:t>
-            </a:r>
-            <a:r>
-              <a:rPr lang="en-US" dirty="0" err="1"/>
-              <a:t>cout</a:t>
-            </a:r>
-            <a:r>
-              <a:rPr lang="en-US" dirty="0"/>
-              <a:t> &lt;&lt; "\</a:t>
-            </a:r>
-            <a:r>
-              <a:rPr lang="en-US" dirty="0" err="1"/>
-              <a:t>nStudent</a:t>
-            </a:r>
-            <a:r>
-              <a:rPr lang="en-US" dirty="0"/>
-              <a:t> " &lt;&lt; </a:t>
-            </a:r>
-            <a:r>
-              <a:rPr lang="en-US" dirty="0" err="1"/>
-              <a:t>i</a:t>
-            </a:r>
-            <a:r>
-              <a:rPr lang="en-US" dirty="0"/>
-              <a:t> + 1 &lt;&lt; </a:t>
-            </a:r>
-            <a:r>
-              <a:rPr lang="en-US" dirty="0" err="1"/>
-              <a:t>endl</a:t>
-            </a:r>
-            <a:r>
-              <a:rPr lang="en-US" dirty="0"/>
-              <a:t>;</a:t>
-            </a:r>
-          </a:p>
-          <a:p>
-            <a:pPr marL="0" indent="0">
-              <a:buNone/>
-            </a:pPr>
-            <a:r>
-              <a:rPr lang="en-US" dirty="0"/>
-              <a:t>        s[</a:t>
-            </a:r>
-            <a:r>
-              <a:rPr lang="en-US" dirty="0" err="1"/>
-              <a:t>i</a:t>
-            </a:r>
-            <a:r>
-              <a:rPr lang="en-US" dirty="0"/>
-              <a:t>].display();</a:t>
-            </a:r>
-          </a:p>
-          <a:p>
-            <a:pPr marL="0" indent="0">
-              <a:buNone/>
-            </a:pPr>
-            <a:r>
-              <a:rPr lang="en-US" dirty="0"/>
-              <a:t>    }</a:t>
-            </a:r>
-          </a:p>
-          <a:p>
-            <a:pPr marL="0" indent="0">
-              <a:buNone/>
-            </a:pPr>
-            <a:endParaRPr lang="en-US" dirty="0"/>
-          </a:p>
-          <a:p>
-            <a:pPr marL="0" indent="0">
-              <a:buNone/>
-            </a:pPr>
-            <a:r>
-              <a:rPr lang="en-US" dirty="0"/>
-              <a:t>  delete[] s;</a:t>
-            </a:r>
-          </a:p>
-          <a:p>
-            <a:pPr marL="0" indent="0">
-              <a:buNone/>
-            </a:pPr>
-            <a:endParaRPr lang="en-US" dirty="0"/>
-          </a:p>
-          <a:p>
-            <a:pPr marL="0" indent="0">
-              <a:buNone/>
-            </a:pPr>
-            <a:r>
-              <a:rPr lang="en-US" dirty="0"/>
-              <a:t>    return 0;</a:t>
-            </a:r>
-          </a:p>
-          <a:p>
-            <a:pPr marL="0" indent="0">
-              <a:buNone/>
-            </a:pPr>
-            <a:r>
-              <a:rPr lang="en-US" dirty="0"/>
-              <a:t>}</a:t>
+              <a:t>Enter total number of students: 4</a:t>
+            </a:r>
+          </a:p>
+          <a:p>
+            <a:pPr marL="0" indent="0">
+              <a:buNone/>
+            </a:pPr>
+            <a:r>
+              <a:rPr lang="en-US" dirty="0"/>
+              <a:t>Enter GPA of students.</a:t>
+            </a:r>
+          </a:p>
+          <a:p>
+            <a:pPr marL="0" indent="0">
+              <a:buNone/>
+            </a:pPr>
+            <a:r>
+              <a:rPr lang="en-US" dirty="0"/>
+              <a:t>Student1: 3.6</a:t>
+            </a:r>
+          </a:p>
+          <a:p>
+            <a:pPr marL="0" indent="0">
+              <a:buNone/>
+            </a:pPr>
+            <a:r>
+              <a:rPr lang="en-US" dirty="0"/>
+              <a:t>Student2: 3.1</a:t>
+            </a:r>
+          </a:p>
+          <a:p>
+            <a:pPr marL="0" indent="0">
+              <a:buNone/>
+            </a:pPr>
+            <a:r>
+              <a:rPr lang="en-US" dirty="0"/>
+              <a:t>Student3: 3.9</a:t>
+            </a:r>
+          </a:p>
+          <a:p>
+            <a:pPr marL="0" indent="0">
+              <a:buNone/>
+            </a:pPr>
+            <a:r>
+              <a:rPr lang="en-US" dirty="0"/>
+              <a:t>Student4: 2.9</a:t>
+            </a:r>
+          </a:p>
+          <a:p>
+            <a:pPr marL="0" indent="0">
+              <a:buNone/>
+            </a:pPr>
+            <a:r>
+              <a:rPr lang="en-US" dirty="0"/>
+              <a:t>Displaying GPA of students.</a:t>
+            </a:r>
+          </a:p>
+          <a:p>
+            <a:pPr marL="0" indent="0">
+              <a:buNone/>
+            </a:pPr>
+            <a:r>
+              <a:rPr lang="en-US" dirty="0"/>
+              <a:t>Student1: 3.6</a:t>
+            </a:r>
+          </a:p>
+          <a:p>
+            <a:pPr marL="0" indent="0">
+              <a:buNone/>
+            </a:pPr>
+            <a:r>
+              <a:rPr lang="en-US" dirty="0"/>
+              <a:t>Student2: 3.1</a:t>
+            </a:r>
+          </a:p>
+          <a:p>
+            <a:pPr marL="0" indent="0">
+              <a:buNone/>
+            </a:pPr>
+            <a:r>
+              <a:rPr lang="en-US" dirty="0"/>
+              <a:t>Student3: 3.9</a:t>
+            </a:r>
+          </a:p>
+          <a:p>
+            <a:pPr marL="0" indent="0">
+              <a:buNone/>
+            </a:pPr>
+            <a:r>
+              <a:rPr lang="en-US" dirty="0"/>
+              <a:t>Student4: 2.9</a:t>
             </a:r>
           </a:p>
         </p:txBody>
@@ -8182,13 +7911,20 @@
     </p:spTree>
     <p:extLst>
       <p:ext uri="{BB962C8B-B14F-4D97-AF65-F5344CB8AC3E}">
-        <p14:creationId xmlns:p14="http://schemas.microsoft.com/office/powerpoint/2010/main" val="3871730382"/>
+        <p14:creationId xmlns:p14="http://schemas.microsoft.com/office/powerpoint/2010/main" val="2688237654"/>
       </p:ext>
     </p:extLst>
   </p:cSld>
   <p:clrMapOvr>
     <a:masterClrMapping/>
   </p:clrMapOvr>
+  <p:timing>
+    <p:tnLst>
+      <p:par>
+        <p:cTn id="1" dur="indefinite" restart="never" nodeType="tmRoot"/>
+      </p:par>
+    </p:tnLst>
+  </p:timing>
 </p:sld>
 </file>
 
@@ -8211,13 +7947,7 @@
       </p:grpSpPr>
       <p:sp>
         <p:nvSpPr>
-          <p:cNvPr id="2" name="Title 1">
-            <a:extLst>
-              <a:ext uri="{FF2B5EF4-FFF2-40B4-BE49-F238E27FC236}">
-                <a16:creationId xmlns:a16="http://schemas.microsoft.com/office/drawing/2014/main" id="{F5679DB5-23F2-C2A7-96B4-BB2FD2EF9E77}"/>
-              </a:ext>
-            </a:extLst>
-          </p:cNvPr>
+          <p:cNvPr id="2" name="Title 1"/>
           <p:cNvSpPr>
             <a:spLocks noGrp="1"/>
           </p:cNvSpPr>
@@ -8230,26 +7960,13 @@
           <a:bodyPr/>
           <a:lstStyle/>
           <a:p>
-            <a:r>
-              <a:rPr lang="en-US" dirty="0"/>
-              <a:t>Exercise</a:t>
-            </a:r>
-            <a:br>
-              <a:rPr lang="en-US" dirty="0"/>
-            </a:br>
-            <a:endParaRPr lang="en-US" dirty="0"/>
-          </a:p>
-        </p:txBody>
-      </p:sp>
-      <p:sp>
-        <p:nvSpPr>
-          <p:cNvPr id="3" name="Content Placeholder 2">
-            <a:extLst>
-              <a:ext uri="{FF2B5EF4-FFF2-40B4-BE49-F238E27FC236}">
-                <a16:creationId xmlns:a16="http://schemas.microsoft.com/office/drawing/2014/main" id="{471ACDE0-3DF2-F050-4A30-F915E2049D23}"/>
-              </a:ext>
-            </a:extLst>
-          </p:cNvPr>
+            <a:endParaRPr lang="en-US"/>
+          </a:p>
+        </p:txBody>
+      </p:sp>
+      <p:sp>
+        <p:nvSpPr>
+          <p:cNvPr id="3" name="Content Placeholder 2"/>
           <p:cNvSpPr>
             <a:spLocks noGrp="1"/>
           </p:cNvSpPr>
@@ -8257,120 +7974,95 @@
             <p:ph idx="1"/>
           </p:nvPr>
         </p:nvSpPr>
-        <p:spPr>
-          <a:xfrm>
-            <a:off x="677333" y="1294229"/>
-            <a:ext cx="10534617" cy="5317586"/>
-          </a:xfrm>
-        </p:spPr>
+        <p:spPr/>
         <p:txBody>
           <a:bodyPr>
-            <a:normAutofit/>
+            <a:normAutofit fontScale="92500" lnSpcReduction="20000"/>
           </a:bodyPr>
           <a:lstStyle/>
           <a:p>
             <a:r>
               <a:rPr lang="en-US" dirty="0"/>
-              <a:t>Exercise 1: Dynamic Array of Objects (Basic)Create a class Student </a:t>
+              <a:t>In this program, we have asked the user to enter the number of students and store it in the </a:t>
             </a:r>
             <a:r>
               <a:rPr lang="en-US" dirty="0" err="1"/>
-              <a:t>with:Student</a:t>
-            </a:r>
-            <a:r>
-              <a:rPr lang="en-US" dirty="0"/>
-              <a:t> ID ,Name ,CGPA, Requirements:</a:t>
-            </a:r>
-          </a:p>
-          <a:p>
-            <a:pPr marL="0" indent="0">
-              <a:buNone/>
-            </a:pPr>
-            <a:r>
-              <a:rPr lang="en-US" dirty="0"/>
-              <a:t>Take the number of students dynamically.</a:t>
-            </a:r>
-          </a:p>
-          <a:p>
-            <a:pPr marL="0" indent="0">
-              <a:buNone/>
-            </a:pPr>
-            <a:r>
-              <a:rPr lang="en-US" dirty="0"/>
-              <a:t>Allocate memory using new.</a:t>
-            </a:r>
-          </a:p>
-          <a:p>
-            <a:pPr marL="0" indent="0">
-              <a:buNone/>
-            </a:pPr>
-            <a:r>
-              <a:rPr lang="en-US" dirty="0"/>
-              <a:t>Input and display student information.</a:t>
-            </a:r>
-          </a:p>
-          <a:p>
-            <a:pPr marL="0" indent="0">
-              <a:buNone/>
-            </a:pPr>
-            <a:r>
-              <a:rPr lang="en-US" dirty="0"/>
-              <a:t>Release memory using delete[].</a:t>
-            </a:r>
-          </a:p>
-          <a:p>
-            <a:r>
-              <a:rPr lang="en-US" dirty="0"/>
-              <a:t>Exercise 2: Dynamic Memory Allocation for Employee Records to Create a class Employee </a:t>
+              <a:t>num</a:t>
+            </a:r>
+            <a:r>
+              <a:rPr lang="en-US" dirty="0"/>
+              <a:t> variable.</a:t>
+            </a:r>
+          </a:p>
+          <a:p>
+            <a:endParaRPr lang="en-US" dirty="0"/>
+          </a:p>
+          <a:p>
+            <a:r>
+              <a:rPr lang="en-US" dirty="0"/>
+              <a:t>Then, we have allocated the memory dynamically for the float array using new.</a:t>
+            </a:r>
+          </a:p>
+          <a:p>
+            <a:endParaRPr lang="en-US" dirty="0"/>
+          </a:p>
+          <a:p>
+            <a:r>
+              <a:rPr lang="en-US" dirty="0"/>
+              <a:t>We enter data into the array (and later print them) using pointer notation.</a:t>
+            </a:r>
+          </a:p>
+          <a:p>
+            <a:endParaRPr lang="en-US" dirty="0"/>
+          </a:p>
+          <a:p>
+            <a:r>
+              <a:rPr lang="en-US" dirty="0"/>
+              <a:t>After we no longer need the array, we deallocate the array memory using the code delete[] </a:t>
             </a:r>
             <a:r>
               <a:rPr lang="en-US" dirty="0" err="1"/>
-              <a:t>with:Employee</a:t>
-            </a:r>
-            <a:r>
-              <a:rPr lang="en-US" dirty="0"/>
-              <a:t> Name, Employee ID, Salary.</a:t>
-            </a:r>
-          </a:p>
-          <a:p>
-            <a:pPr marL="0" indent="0">
-              <a:buNone/>
-            </a:pPr>
-            <a:r>
-              <a:rPr lang="en-US" dirty="0"/>
-              <a:t>Requirements:</a:t>
-            </a:r>
-          </a:p>
-          <a:p>
-            <a:pPr marL="0" indent="0">
-              <a:buNone/>
-            </a:pPr>
-            <a:r>
-              <a:rPr lang="en-US" dirty="0"/>
-              <a:t>Dynamically allocate memory for multiple employees.</a:t>
-            </a:r>
-          </a:p>
-          <a:p>
-            <a:pPr marL="0" indent="0">
-              <a:buNone/>
-            </a:pPr>
-            <a:r>
-              <a:rPr lang="en-US" dirty="0"/>
-              <a:t>Display the employee with the highest salary.</a:t>
-            </a:r>
+              <a:t>ptr</a:t>
+            </a:r>
+            <a:r>
+              <a:rPr lang="en-US" dirty="0"/>
+              <a:t>;.</a:t>
+            </a:r>
+          </a:p>
+          <a:p>
+            <a:endParaRPr lang="en-US" dirty="0"/>
+          </a:p>
+          <a:p>
+            <a:r>
+              <a:rPr lang="en-US" dirty="0"/>
+              <a:t>Notice the use of [] after delete. We use the square brackets [] in order to denote that the memory deallocation is that of an array.</a:t>
+            </a:r>
+          </a:p>
+          <a:p>
+            <a:endParaRPr lang="en-US" dirty="0"/>
+          </a:p>
+          <a:p>
+            <a:endParaRPr lang="en-US" dirty="0"/>
           </a:p>
         </p:txBody>
       </p:sp>
     </p:spTree>
     <p:extLst>
       <p:ext uri="{BB962C8B-B14F-4D97-AF65-F5344CB8AC3E}">
-        <p14:creationId xmlns:p14="http://schemas.microsoft.com/office/powerpoint/2010/main" val="320289016"/>
+        <p14:creationId xmlns:p14="http://schemas.microsoft.com/office/powerpoint/2010/main" val="3425580422"/>
       </p:ext>
     </p:extLst>
   </p:cSld>
   <p:clrMapOvr>
     <a:masterClrMapping/>
   </p:clrMapOvr>
+  <p:timing>
+    <p:tnLst>
+      <p:par>
+        <p:cTn id="1" dur="indefinite" restart="never" nodeType="tmRoot"/>
+      </p:par>
+    </p:tnLst>
+  </p:timing>
 </p:sld>
 </file>
 
@@ -8393,194 +8085,1336 @@
       </p:grpSpPr>
       <p:sp>
         <p:nvSpPr>
-          <p:cNvPr id="3" name="Content Placeholder 2"/>
-          <p:cNvSpPr>
-            <a:spLocks noGrp="1"/>
-          </p:cNvSpPr>
-          <p:nvPr>
-            <p:ph idx="1"/>
+          <p:cNvPr id="2" name="Title 1"/>
+          <p:cNvSpPr>
+            <a:spLocks noGrp="1"/>
+          </p:cNvSpPr>
+          <p:nvPr>
+            <p:ph type="title"/>
           </p:nvPr>
         </p:nvSpPr>
         <p:spPr>
           <a:xfrm>
-            <a:off x="295422" y="436099"/>
-            <a:ext cx="11507372" cy="5605264"/>
+            <a:off x="677333" y="609600"/>
+            <a:ext cx="10160995" cy="829235"/>
           </a:xfrm>
         </p:spPr>
         <p:txBody>
           <a:bodyPr>
-            <a:normAutofit fontScale="40000" lnSpcReduction="20000"/>
+            <a:normAutofit fontScale="90000"/>
           </a:bodyPr>
           <a:lstStyle/>
           <a:p>
-            <a:pPr marL="0" indent="0" algn="r">
-              <a:buNone/>
-            </a:pPr>
-            <a:endParaRPr lang="en-US" sz="4800" dirty="0"/>
-          </a:p>
-          <a:p>
-            <a:pPr>
-              <a:buFont typeface="Wingdings" panose="05000000000000000000" pitchFamily="2" charset="2"/>
-              <a:buChar char="Ø"/>
-            </a:pPr>
-            <a:r>
-              <a:rPr lang="en-US" sz="4800" dirty="0"/>
-              <a:t>Exercise 3: Constructor and Destructor with Dynamic Allocation.</a:t>
-            </a:r>
-          </a:p>
-          <a:p>
-            <a:pPr marL="0" indent="0">
-              <a:buNone/>
-            </a:pPr>
-            <a:r>
-              <a:rPr lang="en-US" sz="4800" dirty="0"/>
-              <a:t>Create a class Book </a:t>
-            </a:r>
-            <a:r>
-              <a:rPr lang="en-US" sz="4800" dirty="0" err="1"/>
-              <a:t>with:Book</a:t>
-            </a:r>
-            <a:r>
-              <a:rPr lang="en-US" sz="4800" dirty="0"/>
-              <a:t> </a:t>
-            </a:r>
-            <a:r>
-              <a:rPr lang="en-US" sz="4800" dirty="0" err="1"/>
-              <a:t>Name,Author</a:t>
-            </a:r>
-            <a:r>
-              <a:rPr lang="en-US" sz="4800" dirty="0"/>
-              <a:t> Name, Price.</a:t>
-            </a:r>
-          </a:p>
-          <a:p>
-            <a:pPr marL="0" indent="0">
-              <a:buNone/>
-            </a:pPr>
-            <a:r>
-              <a:rPr lang="en-US" sz="4800" dirty="0"/>
-              <a:t>Requirements:</a:t>
-            </a:r>
-          </a:p>
-          <a:p>
-            <a:pPr marL="0" indent="0">
-              <a:buNone/>
-            </a:pPr>
-            <a:r>
-              <a:rPr lang="en-US" sz="4800" dirty="0"/>
-              <a:t>Use parameterized constructor.</a:t>
-            </a:r>
-          </a:p>
-          <a:p>
-            <a:pPr marL="0" indent="0">
-              <a:buNone/>
-            </a:pPr>
-            <a:r>
-              <a:rPr lang="en-US" sz="4800" dirty="0"/>
-              <a:t>Create an array of book objects dynamically.</a:t>
-            </a:r>
-          </a:p>
-          <a:p>
-            <a:pPr marL="0" indent="0">
-              <a:buNone/>
-            </a:pPr>
-            <a:r>
-              <a:rPr lang="en-US" sz="4800" dirty="0"/>
-              <a:t>Destructor should print:</a:t>
-            </a:r>
-          </a:p>
-          <a:p>
-            <a:pPr marL="0" indent="0">
-              <a:buNone/>
-            </a:pPr>
-            <a:r>
-              <a:rPr lang="en-US" sz="4800" dirty="0"/>
-              <a:t>Dynamic Memory Allocation Using Pointer to Object.</a:t>
-            </a:r>
-          </a:p>
-          <a:p>
-            <a:pPr>
-              <a:buFont typeface="Wingdings" panose="05000000000000000000" pitchFamily="2" charset="2"/>
-              <a:buChar char="Ø"/>
-            </a:pPr>
-            <a:r>
-              <a:rPr lang="en-US" sz="4800" dirty="0"/>
-              <a:t>Exercise 4: Create a class Rectangle.</a:t>
-            </a:r>
-          </a:p>
-          <a:p>
-            <a:pPr marL="0" indent="0">
-              <a:buNone/>
-            </a:pPr>
-            <a:r>
-              <a:rPr lang="en-US" sz="4800" dirty="0"/>
-              <a:t>Requirements:</a:t>
-            </a:r>
-          </a:p>
-          <a:p>
-            <a:pPr marL="0" indent="0">
-              <a:buNone/>
-            </a:pPr>
-            <a:r>
-              <a:rPr lang="en-US" sz="4800" dirty="0"/>
-              <a:t>Dynamically create one object using pointer.</a:t>
-            </a:r>
-          </a:p>
-          <a:p>
-            <a:pPr marL="0" indent="0">
-              <a:buNone/>
-            </a:pPr>
-            <a:r>
-              <a:rPr lang="en-US" sz="4800" dirty="0"/>
-              <a:t>Input length and width.</a:t>
-            </a:r>
-          </a:p>
-          <a:p>
-            <a:pPr marL="0" indent="0">
-              <a:buNone/>
-            </a:pPr>
-            <a:r>
-              <a:rPr lang="en-US" sz="4800" dirty="0"/>
-              <a:t>Calculate area.</a:t>
-            </a:r>
-          </a:p>
-          <a:p>
-            <a:pPr marL="0" indent="0">
-              <a:buNone/>
-            </a:pPr>
-            <a:r>
-              <a:rPr lang="en-US" sz="4800" dirty="0" err="1"/>
-              <a:t>Example:Rectangle</a:t>
-            </a:r>
-            <a:r>
-              <a:rPr lang="en-US" sz="4800" dirty="0"/>
-              <a:t> *r = new Rectangle;</a:t>
-            </a:r>
-          </a:p>
-          <a:p>
-            <a:pPr marL="0" indent="0" algn="r">
-              <a:buNone/>
-            </a:pPr>
-            <a:endParaRPr lang="en-US" sz="4800" dirty="0"/>
-          </a:p>
-          <a:p>
-            <a:pPr marL="0" indent="0" algn="r">
-              <a:buNone/>
-            </a:pPr>
-            <a:endParaRPr lang="en-US" sz="4800" dirty="0"/>
+            <a:r>
+              <a:rPr lang="en-US" dirty="0"/>
+              <a:t>Example 3: C++ new and delete Operator for Objects</a:t>
+            </a:r>
+          </a:p>
+        </p:txBody>
+      </p:sp>
+      <p:sp>
+        <p:nvSpPr>
+          <p:cNvPr id="3" name="Content Placeholder 2"/>
+          <p:cNvSpPr>
+            <a:spLocks noGrp="1"/>
+          </p:cNvSpPr>
+          <p:nvPr>
+            <p:ph idx="1"/>
+          </p:nvPr>
+        </p:nvSpPr>
+        <p:spPr>
+          <a:xfrm>
+            <a:off x="677333" y="1438835"/>
+            <a:ext cx="4082925" cy="5244353"/>
+          </a:xfrm>
+        </p:spPr>
+        <p:txBody>
+          <a:bodyPr>
+            <a:normAutofit fontScale="85000" lnSpcReduction="20000"/>
+          </a:bodyPr>
+          <a:lstStyle/>
+          <a:p>
+            <a:pPr marL="0" indent="0">
+              <a:buNone/>
+            </a:pPr>
+            <a:r>
+              <a:rPr lang="en-US" dirty="0"/>
+              <a:t>#include &lt;</a:t>
+            </a:r>
+            <a:r>
+              <a:rPr lang="en-US" dirty="0" err="1"/>
+              <a:t>iostream</a:t>
+            </a:r>
+            <a:r>
+              <a:rPr lang="en-US" dirty="0"/>
+              <a:t>&gt;</a:t>
+            </a:r>
+          </a:p>
+          <a:p>
+            <a:pPr marL="0" indent="0">
+              <a:buNone/>
+            </a:pPr>
+            <a:r>
+              <a:rPr lang="en-US" dirty="0"/>
+              <a:t>using namespace </a:t>
+            </a:r>
+            <a:r>
+              <a:rPr lang="en-US" dirty="0" err="1"/>
+              <a:t>std</a:t>
+            </a:r>
+            <a:r>
+              <a:rPr lang="en-US" dirty="0"/>
+              <a:t>;</a:t>
+            </a:r>
+          </a:p>
+          <a:p>
+            <a:pPr marL="0" indent="0">
+              <a:buNone/>
+            </a:pPr>
+            <a:endParaRPr lang="en-US" dirty="0"/>
+          </a:p>
+          <a:p>
+            <a:pPr marL="0" indent="0">
+              <a:buNone/>
+            </a:pPr>
+            <a:r>
+              <a:rPr lang="en-US" dirty="0"/>
+              <a:t>class Student {</a:t>
+            </a:r>
+          </a:p>
+          <a:p>
+            <a:pPr marL="0" indent="0">
+              <a:buNone/>
+            </a:pPr>
+            <a:r>
+              <a:rPr lang="en-US" dirty="0"/>
+              <a:t>  private:</a:t>
+            </a:r>
+          </a:p>
+          <a:p>
+            <a:pPr marL="0" indent="0">
+              <a:buNone/>
+            </a:pPr>
+            <a:r>
+              <a:rPr lang="en-US" dirty="0"/>
+              <a:t>    </a:t>
+            </a:r>
+            <a:r>
+              <a:rPr lang="en-US" dirty="0" err="1"/>
+              <a:t>int</a:t>
+            </a:r>
+            <a:r>
+              <a:rPr lang="en-US" dirty="0"/>
+              <a:t> age;</a:t>
+            </a:r>
+          </a:p>
+          <a:p>
+            <a:pPr marL="0" indent="0">
+              <a:buNone/>
+            </a:pPr>
+            <a:endParaRPr lang="en-US" dirty="0"/>
+          </a:p>
+          <a:p>
+            <a:pPr marL="0" indent="0">
+              <a:buNone/>
+            </a:pPr>
+            <a:r>
+              <a:rPr lang="en-US" dirty="0"/>
+              <a:t>  public:</a:t>
+            </a:r>
+          </a:p>
+          <a:p>
+            <a:pPr marL="0" indent="0">
+              <a:buNone/>
+            </a:pPr>
+            <a:endParaRPr lang="en-US" dirty="0"/>
+          </a:p>
+          <a:p>
+            <a:pPr marL="0" indent="0">
+              <a:buNone/>
+            </a:pPr>
+            <a:r>
+              <a:rPr lang="en-US" dirty="0"/>
+              <a:t>    // constructor initializes age to 12</a:t>
+            </a:r>
+          </a:p>
+          <a:p>
+            <a:pPr marL="0" indent="0">
+              <a:buNone/>
+            </a:pPr>
+            <a:r>
+              <a:rPr lang="en-US" dirty="0"/>
+              <a:t>    Student() : age(12) {}</a:t>
+            </a:r>
+          </a:p>
+          <a:p>
+            <a:pPr marL="0" indent="0">
+              <a:buNone/>
+            </a:pPr>
+            <a:endParaRPr lang="en-US" dirty="0"/>
+          </a:p>
+          <a:p>
+            <a:pPr marL="0" indent="0">
+              <a:buNone/>
+            </a:pPr>
+            <a:r>
+              <a:rPr lang="en-US" dirty="0"/>
+              <a:t>    void </a:t>
+            </a:r>
+            <a:r>
+              <a:rPr lang="en-US" dirty="0" err="1"/>
+              <a:t>getAge</a:t>
+            </a:r>
+            <a:r>
+              <a:rPr lang="en-US" dirty="0"/>
+              <a:t>() {</a:t>
+            </a:r>
+          </a:p>
+          <a:p>
+            <a:pPr marL="0" indent="0">
+              <a:buNone/>
+            </a:pPr>
+            <a:r>
+              <a:rPr lang="en-US" dirty="0"/>
+              <a:t>      </a:t>
+            </a:r>
+            <a:r>
+              <a:rPr lang="en-US" dirty="0" err="1"/>
+              <a:t>cout</a:t>
+            </a:r>
+            <a:r>
+              <a:rPr lang="en-US" dirty="0"/>
+              <a:t> &lt;&lt; "Age = " &lt;&lt; age &lt;&lt; </a:t>
+            </a:r>
+            <a:r>
+              <a:rPr lang="en-US" dirty="0" err="1"/>
+              <a:t>endl</a:t>
+            </a:r>
+            <a:r>
+              <a:rPr lang="en-US" dirty="0"/>
+              <a:t>;</a:t>
+            </a:r>
+          </a:p>
+          <a:p>
+            <a:pPr marL="0" indent="0">
+              <a:buNone/>
+            </a:pPr>
+            <a:r>
+              <a:rPr lang="en-US" dirty="0"/>
+              <a:t>    }</a:t>
+            </a:r>
+          </a:p>
+          <a:p>
+            <a:pPr marL="0" indent="0">
+              <a:buNone/>
+            </a:pPr>
+            <a:r>
+              <a:rPr lang="en-US" dirty="0"/>
+              <a:t>};</a:t>
+            </a:r>
+          </a:p>
+        </p:txBody>
+      </p:sp>
+      <p:sp>
+        <p:nvSpPr>
+          <p:cNvPr id="4" name="TextBox 3"/>
+          <p:cNvSpPr txBox="1"/>
+          <p:nvPr/>
+        </p:nvSpPr>
+        <p:spPr>
+          <a:xfrm>
+            <a:off x="5930153" y="1438835"/>
+            <a:ext cx="5298142" cy="3293209"/>
+          </a:xfrm>
+          <a:prstGeom prst="rect">
+            <a:avLst/>
+          </a:prstGeom>
+          <a:noFill/>
+        </p:spPr>
+        <p:txBody>
+          <a:bodyPr wrap="square" rtlCol="0">
+            <a:spAutoFit/>
+          </a:bodyPr>
+          <a:lstStyle/>
+          <a:p>
+            <a:r>
+              <a:rPr lang="en-US" sz="1600" dirty="0" err="1">
+                <a:solidFill>
+                  <a:schemeClr val="tx2"/>
+                </a:solidFill>
+              </a:rPr>
+              <a:t>int</a:t>
+            </a:r>
+            <a:r>
+              <a:rPr lang="en-US" sz="1600" dirty="0">
+                <a:solidFill>
+                  <a:schemeClr val="tx2"/>
+                </a:solidFill>
+              </a:rPr>
+              <a:t> main() {</a:t>
+            </a:r>
+          </a:p>
+          <a:p>
+            <a:endParaRPr lang="en-US" sz="1600" dirty="0">
+              <a:solidFill>
+                <a:schemeClr val="tx2"/>
+              </a:solidFill>
+            </a:endParaRPr>
+          </a:p>
+          <a:p>
+            <a:r>
+              <a:rPr lang="en-US" sz="1600" dirty="0">
+                <a:solidFill>
+                  <a:schemeClr val="tx2"/>
+                </a:solidFill>
+              </a:rPr>
+              <a:t>  // dynamically declare Student object</a:t>
+            </a:r>
+          </a:p>
+          <a:p>
+            <a:r>
+              <a:rPr lang="en-US" sz="1600" dirty="0">
+                <a:solidFill>
+                  <a:schemeClr val="tx2"/>
+                </a:solidFill>
+              </a:rPr>
+              <a:t>  Student* </a:t>
+            </a:r>
+            <a:r>
+              <a:rPr lang="en-US" sz="1600" dirty="0" err="1">
+                <a:solidFill>
+                  <a:schemeClr val="tx2"/>
+                </a:solidFill>
+              </a:rPr>
+              <a:t>ptr</a:t>
+            </a:r>
+            <a:r>
+              <a:rPr lang="en-US" sz="1600" dirty="0">
+                <a:solidFill>
+                  <a:schemeClr val="tx2"/>
+                </a:solidFill>
+              </a:rPr>
+              <a:t> = new Student();</a:t>
+            </a:r>
+          </a:p>
+          <a:p>
+            <a:endParaRPr lang="en-US" sz="1600" dirty="0">
+              <a:solidFill>
+                <a:schemeClr val="tx2"/>
+              </a:solidFill>
+            </a:endParaRPr>
+          </a:p>
+          <a:p>
+            <a:r>
+              <a:rPr lang="en-US" sz="1600" dirty="0">
+                <a:solidFill>
+                  <a:schemeClr val="tx2"/>
+                </a:solidFill>
+              </a:rPr>
+              <a:t>  // call </a:t>
+            </a:r>
+            <a:r>
+              <a:rPr lang="en-US" sz="1600" dirty="0" err="1">
+                <a:solidFill>
+                  <a:schemeClr val="tx2"/>
+                </a:solidFill>
+              </a:rPr>
+              <a:t>getAge</a:t>
+            </a:r>
+            <a:r>
+              <a:rPr lang="en-US" sz="1600" dirty="0">
+                <a:solidFill>
+                  <a:schemeClr val="tx2"/>
+                </a:solidFill>
+              </a:rPr>
+              <a:t>() function</a:t>
+            </a:r>
+          </a:p>
+          <a:p>
+            <a:r>
+              <a:rPr lang="en-US" sz="1600" dirty="0">
+                <a:solidFill>
+                  <a:schemeClr val="tx2"/>
+                </a:solidFill>
+              </a:rPr>
+              <a:t>  </a:t>
+            </a:r>
+            <a:r>
+              <a:rPr lang="en-US" sz="1600" dirty="0" err="1">
+                <a:solidFill>
+                  <a:schemeClr val="tx2"/>
+                </a:solidFill>
+              </a:rPr>
+              <a:t>ptr</a:t>
+            </a:r>
+            <a:r>
+              <a:rPr lang="en-US" sz="1600" dirty="0">
+                <a:solidFill>
+                  <a:schemeClr val="tx2"/>
+                </a:solidFill>
+              </a:rPr>
+              <a:t>-&gt;</a:t>
+            </a:r>
+            <a:r>
+              <a:rPr lang="en-US" sz="1600" dirty="0" err="1">
+                <a:solidFill>
+                  <a:schemeClr val="tx2"/>
+                </a:solidFill>
+              </a:rPr>
+              <a:t>getAge</a:t>
+            </a:r>
+            <a:r>
+              <a:rPr lang="en-US" sz="1600" dirty="0">
+                <a:solidFill>
+                  <a:schemeClr val="tx2"/>
+                </a:solidFill>
+              </a:rPr>
+              <a:t>();</a:t>
+            </a:r>
+          </a:p>
+          <a:p>
+            <a:endParaRPr lang="en-US" sz="1600" dirty="0">
+              <a:solidFill>
+                <a:schemeClr val="tx2"/>
+              </a:solidFill>
+            </a:endParaRPr>
+          </a:p>
+          <a:p>
+            <a:r>
+              <a:rPr lang="en-US" sz="1600" dirty="0">
+                <a:solidFill>
+                  <a:schemeClr val="tx2"/>
+                </a:solidFill>
+              </a:rPr>
+              <a:t>  // </a:t>
+            </a:r>
+            <a:r>
+              <a:rPr lang="en-US" sz="1600" dirty="0" err="1">
+                <a:solidFill>
+                  <a:schemeClr val="tx2"/>
+                </a:solidFill>
+              </a:rPr>
+              <a:t>ptr</a:t>
+            </a:r>
+            <a:r>
+              <a:rPr lang="en-US" sz="1600" dirty="0">
+                <a:solidFill>
+                  <a:schemeClr val="tx2"/>
+                </a:solidFill>
+              </a:rPr>
+              <a:t> memory is released</a:t>
+            </a:r>
+          </a:p>
+          <a:p>
+            <a:r>
+              <a:rPr lang="en-US" sz="1600" dirty="0">
+                <a:solidFill>
+                  <a:schemeClr val="tx2"/>
+                </a:solidFill>
+              </a:rPr>
+              <a:t>  delete </a:t>
+            </a:r>
+            <a:r>
+              <a:rPr lang="en-US" sz="1600" dirty="0" err="1">
+                <a:solidFill>
+                  <a:schemeClr val="tx2"/>
+                </a:solidFill>
+              </a:rPr>
+              <a:t>ptr</a:t>
+            </a:r>
+            <a:r>
+              <a:rPr lang="en-US" sz="1600" dirty="0">
+                <a:solidFill>
+                  <a:schemeClr val="tx2"/>
+                </a:solidFill>
+              </a:rPr>
+              <a:t>;</a:t>
+            </a:r>
+          </a:p>
+          <a:p>
+            <a:endParaRPr lang="en-US" sz="1600" dirty="0">
+              <a:solidFill>
+                <a:schemeClr val="tx2"/>
+              </a:solidFill>
+            </a:endParaRPr>
+          </a:p>
+          <a:p>
+            <a:r>
+              <a:rPr lang="en-US" sz="1600" dirty="0">
+                <a:solidFill>
+                  <a:schemeClr val="tx2"/>
+                </a:solidFill>
+              </a:rPr>
+              <a:t>  return 0;</a:t>
+            </a:r>
+          </a:p>
+          <a:p>
+            <a:r>
+              <a:rPr lang="en-US" sz="1600" dirty="0">
+                <a:solidFill>
+                  <a:schemeClr val="tx2"/>
+                </a:solidFill>
+              </a:rPr>
+              <a:t>}</a:t>
+            </a:r>
           </a:p>
         </p:txBody>
       </p:sp>
     </p:spTree>
     <p:extLst>
       <p:ext uri="{BB962C8B-B14F-4D97-AF65-F5344CB8AC3E}">
-        <p14:creationId xmlns:p14="http://schemas.microsoft.com/office/powerpoint/2010/main" val="126121837"/>
+        <p14:creationId xmlns:p14="http://schemas.microsoft.com/office/powerpoint/2010/main" val="3881789860"/>
       </p:ext>
     </p:extLst>
   </p:cSld>
   <p:clrMapOvr>
     <a:masterClrMapping/>
   </p:clrMapOvr>
+  <p:timing>
+    <p:tnLst>
+      <p:par>
+        <p:cTn id="1" dur="indefinite" restart="never" nodeType="tmRoot"/>
+      </p:par>
+    </p:tnLst>
+  </p:timing>
+</p:sld>
+</file>
+
+<file path=ppt/slides/slide18.xml><?xml version="1.0" encoding="utf-8"?>
+<p:sld xmlns:a="http://schemas.openxmlformats.org/drawingml/2006/main" xmlns:r="http://schemas.openxmlformats.org/officeDocument/2006/relationships" xmlns:p="http://schemas.openxmlformats.org/presentationml/2006/main">
+  <p:cSld>
+    <p:spTree>
+      <p:nvGrpSpPr>
+        <p:cNvPr id="1" name=""/>
+        <p:cNvGrpSpPr/>
+        <p:nvPr/>
+      </p:nvGrpSpPr>
+      <p:grpSpPr>
+        <a:xfrm>
+          <a:off x="0" y="0"/>
+          <a:ext cx="0" cy="0"/>
+          <a:chOff x="0" y="0"/>
+          <a:chExt cx="0" cy="0"/>
+        </a:xfrm>
+      </p:grpSpPr>
+      <p:sp>
+        <p:nvSpPr>
+          <p:cNvPr id="3" name="Content Placeholder 2"/>
+          <p:cNvSpPr>
+            <a:spLocks noGrp="1"/>
+          </p:cNvSpPr>
+          <p:nvPr>
+            <p:ph idx="1"/>
+          </p:nvPr>
+        </p:nvSpPr>
+        <p:spPr>
+          <a:xfrm>
+            <a:off x="719536" y="309488"/>
+            <a:ext cx="9423269" cy="5685003"/>
+          </a:xfrm>
+        </p:spPr>
+        <p:txBody>
+          <a:bodyPr>
+            <a:normAutofit fontScale="92500" lnSpcReduction="20000"/>
+          </a:bodyPr>
+          <a:lstStyle/>
+          <a:p>
+            <a:r>
+              <a:rPr lang="en-US" dirty="0"/>
+              <a:t>Output</a:t>
+            </a:r>
+          </a:p>
+          <a:p>
+            <a:endParaRPr lang="en-US" dirty="0"/>
+          </a:p>
+          <a:p>
+            <a:pPr marL="0" indent="0">
+              <a:buNone/>
+            </a:pPr>
+            <a:r>
+              <a:rPr lang="en-US" dirty="0"/>
+              <a:t>Age = 12</a:t>
+            </a:r>
+          </a:p>
+          <a:p>
+            <a:r>
+              <a:rPr lang="en-US" dirty="0"/>
+              <a:t>In this program, we have created a Student class that has a private variable age.</a:t>
+            </a:r>
+          </a:p>
+          <a:p>
+            <a:endParaRPr lang="en-US" dirty="0"/>
+          </a:p>
+          <a:p>
+            <a:r>
+              <a:rPr lang="en-US" dirty="0"/>
+              <a:t>We have initialized age to 12 in the default constructor Student() and print its value with the function </a:t>
+            </a:r>
+            <a:r>
+              <a:rPr lang="en-US" dirty="0" err="1"/>
+              <a:t>getAge</a:t>
+            </a:r>
+            <a:r>
+              <a:rPr lang="en-US" dirty="0"/>
+              <a:t>().</a:t>
+            </a:r>
+          </a:p>
+          <a:p>
+            <a:endParaRPr lang="en-US" dirty="0"/>
+          </a:p>
+          <a:p>
+            <a:r>
+              <a:rPr lang="en-US" dirty="0"/>
+              <a:t>In main(), we have created a Student object using the new operator and use the pointer </a:t>
+            </a:r>
+            <a:r>
+              <a:rPr lang="en-US" dirty="0" err="1"/>
+              <a:t>ptr</a:t>
+            </a:r>
+            <a:r>
+              <a:rPr lang="en-US" dirty="0"/>
+              <a:t> to point to its address.</a:t>
+            </a:r>
+          </a:p>
+          <a:p>
+            <a:endParaRPr lang="en-US" dirty="0"/>
+          </a:p>
+          <a:p>
+            <a:r>
+              <a:rPr lang="en-US" dirty="0"/>
+              <a:t>The moment the object is created, the Student() constructor initializes age to 12.</a:t>
+            </a:r>
+          </a:p>
+          <a:p>
+            <a:endParaRPr lang="en-US" dirty="0"/>
+          </a:p>
+          <a:p>
+            <a:r>
+              <a:rPr lang="en-US" dirty="0"/>
+              <a:t>We then call the </a:t>
+            </a:r>
+            <a:r>
+              <a:rPr lang="en-US" dirty="0" err="1"/>
+              <a:t>getAge</a:t>
+            </a:r>
+            <a:r>
+              <a:rPr lang="en-US" dirty="0"/>
+              <a:t>() function using the code:</a:t>
+            </a:r>
+          </a:p>
+          <a:p>
+            <a:endParaRPr lang="en-US" dirty="0"/>
+          </a:p>
+          <a:p>
+            <a:pPr marL="0" indent="0">
+              <a:buNone/>
+            </a:pPr>
+            <a:r>
+              <a:rPr lang="en-US" dirty="0" err="1"/>
+              <a:t>ptr</a:t>
+            </a:r>
+            <a:r>
+              <a:rPr lang="en-US" dirty="0"/>
+              <a:t>-&gt;</a:t>
+            </a:r>
+            <a:r>
+              <a:rPr lang="en-US" dirty="0" err="1"/>
+              <a:t>getAge</a:t>
+            </a:r>
+            <a:r>
+              <a:rPr lang="en-US" dirty="0"/>
+              <a:t>();</a:t>
+            </a:r>
+          </a:p>
+          <a:p>
+            <a:r>
+              <a:rPr lang="en-US" dirty="0"/>
+              <a:t>Notice the arrow operator -&gt;. This operator is used to access class members using pointers.</a:t>
+            </a:r>
+          </a:p>
+          <a:p>
+            <a:endParaRPr lang="en-US" dirty="0"/>
+          </a:p>
+          <a:p>
+            <a:endParaRPr lang="en-US" dirty="0"/>
+          </a:p>
+        </p:txBody>
+      </p:sp>
+    </p:spTree>
+    <p:extLst>
+      <p:ext uri="{BB962C8B-B14F-4D97-AF65-F5344CB8AC3E}">
+        <p14:creationId xmlns:p14="http://schemas.microsoft.com/office/powerpoint/2010/main" val="3537471962"/>
+      </p:ext>
+    </p:extLst>
+  </p:cSld>
+  <p:clrMapOvr>
+    <a:masterClrMapping/>
+  </p:clrMapOvr>
+  <p:timing>
+    <p:tnLst>
+      <p:par>
+        <p:cTn id="1" dur="indefinite" restart="never" nodeType="tmRoot"/>
+      </p:par>
+    </p:tnLst>
+  </p:timing>
+</p:sld>
+</file>
+
+<file path=ppt/slides/slide19.xml><?xml version="1.0" encoding="utf-8"?>
+<p:sld xmlns:a="http://schemas.openxmlformats.org/drawingml/2006/main" xmlns:r="http://schemas.openxmlformats.org/officeDocument/2006/relationships" xmlns:p="http://schemas.openxmlformats.org/presentationml/2006/main">
+  <p:cSld>
+    <p:spTree>
+      <p:nvGrpSpPr>
+        <p:cNvPr id="1" name=""/>
+        <p:cNvGrpSpPr/>
+        <p:nvPr/>
+      </p:nvGrpSpPr>
+      <p:grpSpPr>
+        <a:xfrm>
+          <a:off x="0" y="0"/>
+          <a:ext cx="0" cy="0"/>
+          <a:chOff x="0" y="0"/>
+          <a:chExt cx="0" cy="0"/>
+        </a:xfrm>
+      </p:grpSpPr>
+      <p:sp>
+        <p:nvSpPr>
+          <p:cNvPr id="3" name="Content Placeholder 2">
+            <a:extLst>
+              <a:ext uri="{FF2B5EF4-FFF2-40B4-BE49-F238E27FC236}">
+                <a16:creationId xmlns:a16="http://schemas.microsoft.com/office/drawing/2014/main" id="{E0AAFEAE-0ACF-0452-A798-688124AFECCF}"/>
+              </a:ext>
+            </a:extLst>
+          </p:cNvPr>
+          <p:cNvSpPr>
+            <a:spLocks noGrp="1"/>
+          </p:cNvSpPr>
+          <p:nvPr>
+            <p:ph idx="1"/>
+          </p:nvPr>
+        </p:nvSpPr>
+        <p:spPr>
+          <a:xfrm>
+            <a:off x="0" y="168813"/>
+            <a:ext cx="12192000" cy="6689188"/>
+          </a:xfrm>
+        </p:spPr>
+        <p:txBody>
+          <a:bodyPr numCol="3">
+            <a:normAutofit/>
+          </a:bodyPr>
+          <a:lstStyle/>
+          <a:p>
+            <a:pPr marL="0" indent="0">
+              <a:buNone/>
+            </a:pPr>
+            <a:r>
+              <a:rPr lang="en-US" dirty="0"/>
+              <a:t>#include &lt;iostream&gt;</a:t>
+            </a:r>
+          </a:p>
+          <a:p>
+            <a:pPr marL="0" indent="0">
+              <a:buNone/>
+            </a:pPr>
+            <a:r>
+              <a:rPr lang="en-US" dirty="0"/>
+              <a:t>using namespace std;</a:t>
+            </a:r>
+          </a:p>
+          <a:p>
+            <a:pPr marL="0" indent="0">
+              <a:buNone/>
+            </a:pPr>
+            <a:endParaRPr lang="en-US" dirty="0"/>
+          </a:p>
+          <a:p>
+            <a:pPr marL="0" indent="0">
+              <a:buNone/>
+            </a:pPr>
+            <a:r>
+              <a:rPr lang="en-US" dirty="0"/>
+              <a:t>class Student {</a:t>
+            </a:r>
+          </a:p>
+          <a:p>
+            <a:pPr marL="0" indent="0">
+              <a:buNone/>
+            </a:pPr>
+            <a:r>
+              <a:rPr lang="en-US" dirty="0"/>
+              <a:t>private:</a:t>
+            </a:r>
+          </a:p>
+          <a:p>
+            <a:pPr marL="0" indent="0">
+              <a:buNone/>
+            </a:pPr>
+            <a:r>
+              <a:rPr lang="en-US" dirty="0"/>
+              <a:t>    string name;</a:t>
+            </a:r>
+          </a:p>
+          <a:p>
+            <a:pPr marL="0" indent="0">
+              <a:buNone/>
+            </a:pPr>
+            <a:r>
+              <a:rPr lang="en-US" dirty="0"/>
+              <a:t>    int age;</a:t>
+            </a:r>
+          </a:p>
+          <a:p>
+            <a:pPr marL="0" indent="0">
+              <a:buNone/>
+            </a:pPr>
+            <a:endParaRPr lang="en-US" dirty="0"/>
+          </a:p>
+          <a:p>
+            <a:pPr marL="0" indent="0">
+              <a:buNone/>
+            </a:pPr>
+            <a:r>
+              <a:rPr lang="en-US" dirty="0"/>
+              <a:t>public:</a:t>
+            </a:r>
+          </a:p>
+          <a:p>
+            <a:pPr marL="0" indent="0">
+              <a:buNone/>
+            </a:pPr>
+            <a:r>
+              <a:rPr lang="en-US" dirty="0"/>
+              <a:t>void input() {</a:t>
+            </a:r>
+          </a:p>
+          <a:p>
+            <a:pPr marL="0" indent="0">
+              <a:buNone/>
+            </a:pPr>
+            <a:r>
+              <a:rPr lang="en-US" dirty="0"/>
+              <a:t>        </a:t>
+            </a:r>
+            <a:r>
+              <a:rPr lang="en-US" dirty="0" err="1"/>
+              <a:t>cout</a:t>
+            </a:r>
+            <a:r>
+              <a:rPr lang="en-US" dirty="0"/>
+              <a:t> &lt;&lt; "Enter Name: ";</a:t>
+            </a:r>
+          </a:p>
+          <a:p>
+            <a:pPr marL="0" indent="0">
+              <a:buNone/>
+            </a:pPr>
+            <a:r>
+              <a:rPr lang="en-US" dirty="0"/>
+              <a:t>        </a:t>
+            </a:r>
+            <a:r>
+              <a:rPr lang="en-US" dirty="0" err="1"/>
+              <a:t>cin</a:t>
+            </a:r>
+            <a:r>
+              <a:rPr lang="en-US" dirty="0"/>
+              <a:t> &gt;&gt; name;</a:t>
+            </a:r>
+          </a:p>
+          <a:p>
+            <a:pPr marL="0" indent="0">
+              <a:buNone/>
+            </a:pPr>
+            <a:endParaRPr lang="en-US" dirty="0"/>
+          </a:p>
+          <a:p>
+            <a:pPr marL="0" indent="0">
+              <a:buNone/>
+            </a:pPr>
+            <a:r>
+              <a:rPr lang="en-US" dirty="0"/>
+              <a:t>        </a:t>
+            </a:r>
+            <a:r>
+              <a:rPr lang="en-US" dirty="0" err="1"/>
+              <a:t>cout</a:t>
+            </a:r>
+            <a:r>
+              <a:rPr lang="en-US" dirty="0"/>
+              <a:t> &lt;&lt; "Enter Age: ";</a:t>
+            </a:r>
+          </a:p>
+          <a:p>
+            <a:pPr marL="0" indent="0">
+              <a:buNone/>
+            </a:pPr>
+            <a:r>
+              <a:rPr lang="en-US" dirty="0"/>
+              <a:t>        </a:t>
+            </a:r>
+            <a:r>
+              <a:rPr lang="en-US" dirty="0" err="1"/>
+              <a:t>cin</a:t>
+            </a:r>
+            <a:r>
+              <a:rPr lang="en-US" dirty="0"/>
+              <a:t> &gt;&gt; age;</a:t>
+            </a:r>
+          </a:p>
+          <a:p>
+            <a:pPr marL="0" indent="0">
+              <a:buNone/>
+            </a:pPr>
+            <a:r>
+              <a:rPr lang="en-US" dirty="0"/>
+              <a:t>    }</a:t>
+            </a:r>
+          </a:p>
+          <a:p>
+            <a:pPr marL="0" indent="0">
+              <a:buNone/>
+            </a:pPr>
+            <a:r>
+              <a:rPr lang="en-US" dirty="0"/>
+              <a:t>void display() {</a:t>
+            </a:r>
+          </a:p>
+          <a:p>
+            <a:pPr marL="0" indent="0">
+              <a:buNone/>
+            </a:pPr>
+            <a:r>
+              <a:rPr lang="en-US" dirty="0"/>
+              <a:t>        </a:t>
+            </a:r>
+            <a:r>
+              <a:rPr lang="en-US" dirty="0" err="1"/>
+              <a:t>cout</a:t>
+            </a:r>
+            <a:r>
+              <a:rPr lang="en-US" dirty="0"/>
+              <a:t> &lt;&lt; "Name: " &lt;&lt; name &lt;&lt; </a:t>
+            </a:r>
+            <a:r>
+              <a:rPr lang="en-US" dirty="0" err="1"/>
+              <a:t>endl</a:t>
+            </a:r>
+            <a:r>
+              <a:rPr lang="en-US" dirty="0"/>
+              <a:t>;</a:t>
+            </a:r>
+          </a:p>
+          <a:p>
+            <a:pPr marL="0" indent="0">
+              <a:buNone/>
+            </a:pPr>
+            <a:r>
+              <a:rPr lang="en-US" dirty="0"/>
+              <a:t>        </a:t>
+            </a:r>
+            <a:r>
+              <a:rPr lang="en-US" dirty="0" err="1"/>
+              <a:t>cout</a:t>
+            </a:r>
+            <a:r>
+              <a:rPr lang="en-US" dirty="0"/>
+              <a:t> &lt;&lt; "Age: " &lt;&lt; age &lt;&lt; </a:t>
+            </a:r>
+            <a:r>
+              <a:rPr lang="en-US" dirty="0" err="1"/>
+              <a:t>endl</a:t>
+            </a:r>
+            <a:r>
+              <a:rPr lang="en-US" dirty="0"/>
+              <a:t>;</a:t>
+            </a:r>
+          </a:p>
+          <a:p>
+            <a:pPr marL="0" indent="0">
+              <a:buNone/>
+            </a:pPr>
+            <a:r>
+              <a:rPr lang="en-US" dirty="0"/>
+              <a:t>    }</a:t>
+            </a:r>
+          </a:p>
+          <a:p>
+            <a:pPr marL="0" indent="0">
+              <a:buNone/>
+            </a:pPr>
+            <a:r>
+              <a:rPr lang="en-US" dirty="0"/>
+              <a:t>};</a:t>
+            </a:r>
+          </a:p>
+          <a:p>
+            <a:pPr marL="0" indent="0">
+              <a:buNone/>
+            </a:pPr>
+            <a:endParaRPr lang="en-US" dirty="0"/>
+          </a:p>
+          <a:p>
+            <a:pPr marL="0" indent="0">
+              <a:buNone/>
+            </a:pPr>
+            <a:r>
+              <a:rPr lang="en-US" dirty="0"/>
+              <a:t>int main() {</a:t>
+            </a:r>
+          </a:p>
+          <a:p>
+            <a:pPr marL="0" indent="0">
+              <a:buNone/>
+            </a:pPr>
+            <a:r>
+              <a:rPr lang="en-US" dirty="0"/>
+              <a:t>    int n;</a:t>
+            </a:r>
+          </a:p>
+          <a:p>
+            <a:pPr marL="0" indent="0">
+              <a:buNone/>
+            </a:pPr>
+            <a:r>
+              <a:rPr lang="en-US" dirty="0"/>
+              <a:t>  </a:t>
+            </a:r>
+            <a:r>
+              <a:rPr lang="en-US" dirty="0" err="1"/>
+              <a:t>cout</a:t>
+            </a:r>
+            <a:r>
+              <a:rPr lang="en-US" dirty="0"/>
+              <a:t> &lt;&lt; "Enter number of students: ";   </a:t>
+            </a:r>
+          </a:p>
+          <a:p>
+            <a:pPr marL="0" indent="0">
+              <a:buNone/>
+            </a:pPr>
+            <a:r>
+              <a:rPr lang="en-US" dirty="0"/>
+              <a:t>    </a:t>
+            </a:r>
+            <a:r>
+              <a:rPr lang="en-US" dirty="0" err="1"/>
+              <a:t>cin</a:t>
+            </a:r>
+            <a:r>
+              <a:rPr lang="en-US" dirty="0"/>
+              <a:t> &gt;&gt; n;</a:t>
+            </a:r>
+          </a:p>
+          <a:p>
+            <a:pPr marL="0" indent="0">
+              <a:buNone/>
+            </a:pPr>
+            <a:r>
+              <a:rPr lang="en-US" dirty="0"/>
+              <a:t>Student* s = new Student[n];</a:t>
+            </a:r>
+          </a:p>
+          <a:p>
+            <a:pPr marL="0" indent="0">
+              <a:buNone/>
+            </a:pPr>
+            <a:r>
+              <a:rPr lang="en-US" dirty="0" err="1"/>
+              <a:t>cout</a:t>
+            </a:r>
+            <a:r>
+              <a:rPr lang="en-US" dirty="0"/>
+              <a:t> &lt;&lt; "\</a:t>
+            </a:r>
+            <a:r>
+              <a:rPr lang="en-US" dirty="0" err="1"/>
+              <a:t>nEnter</a:t>
+            </a:r>
+            <a:r>
+              <a:rPr lang="en-US" dirty="0"/>
+              <a:t> Student Information:\n";</a:t>
+            </a:r>
+          </a:p>
+          <a:p>
+            <a:pPr marL="0" indent="0">
+              <a:buNone/>
+            </a:pPr>
+            <a:r>
+              <a:rPr lang="en-US" dirty="0"/>
+              <a:t>    for (int </a:t>
+            </a:r>
+            <a:r>
+              <a:rPr lang="en-US" dirty="0" err="1"/>
+              <a:t>i</a:t>
+            </a:r>
+            <a:r>
+              <a:rPr lang="en-US" dirty="0"/>
+              <a:t> = 0; </a:t>
+            </a:r>
+            <a:r>
+              <a:rPr lang="en-US" dirty="0" err="1"/>
+              <a:t>i</a:t>
+            </a:r>
+            <a:r>
+              <a:rPr lang="en-US" dirty="0"/>
+              <a:t> &lt; n; </a:t>
+            </a:r>
+            <a:r>
+              <a:rPr lang="en-US" dirty="0" err="1"/>
+              <a:t>i</a:t>
+            </a:r>
+            <a:r>
+              <a:rPr lang="en-US" dirty="0"/>
+              <a:t>++) {</a:t>
+            </a:r>
+          </a:p>
+          <a:p>
+            <a:pPr marL="0" indent="0">
+              <a:buNone/>
+            </a:pPr>
+            <a:r>
+              <a:rPr lang="en-US" dirty="0"/>
+              <a:t>        </a:t>
+            </a:r>
+            <a:r>
+              <a:rPr lang="en-US" dirty="0" err="1"/>
+              <a:t>cout</a:t>
+            </a:r>
+            <a:r>
+              <a:rPr lang="en-US" dirty="0"/>
+              <a:t> &lt;&lt; "\</a:t>
+            </a:r>
+            <a:r>
+              <a:rPr lang="en-US" dirty="0" err="1"/>
+              <a:t>nStudent</a:t>
+            </a:r>
+            <a:r>
+              <a:rPr lang="en-US" dirty="0"/>
+              <a:t> " &lt;&lt; </a:t>
+            </a:r>
+            <a:r>
+              <a:rPr lang="en-US" dirty="0" err="1"/>
+              <a:t>i</a:t>
+            </a:r>
+            <a:r>
+              <a:rPr lang="en-US" dirty="0"/>
+              <a:t> + 1 &lt;&lt; </a:t>
+            </a:r>
+            <a:r>
+              <a:rPr lang="en-US" dirty="0" err="1"/>
+              <a:t>endl</a:t>
+            </a:r>
+            <a:r>
+              <a:rPr lang="en-US" dirty="0"/>
+              <a:t>;</a:t>
+            </a:r>
+          </a:p>
+          <a:p>
+            <a:pPr marL="0" indent="0">
+              <a:buNone/>
+            </a:pPr>
+            <a:r>
+              <a:rPr lang="en-US" dirty="0"/>
+              <a:t>        s[</a:t>
+            </a:r>
+            <a:r>
+              <a:rPr lang="en-US" dirty="0" err="1"/>
+              <a:t>i</a:t>
+            </a:r>
+            <a:r>
+              <a:rPr lang="en-US" dirty="0"/>
+              <a:t>].input();</a:t>
+            </a:r>
+          </a:p>
+          <a:p>
+            <a:pPr marL="0" indent="0">
+              <a:buNone/>
+            </a:pPr>
+            <a:r>
+              <a:rPr lang="en-US" dirty="0"/>
+              <a:t>    }</a:t>
+            </a:r>
+          </a:p>
+          <a:p>
+            <a:pPr marL="0" indent="0">
+              <a:buNone/>
+            </a:pPr>
+            <a:r>
+              <a:rPr lang="en-US" dirty="0" err="1"/>
+              <a:t>cout</a:t>
+            </a:r>
+            <a:r>
+              <a:rPr lang="en-US" dirty="0"/>
+              <a:t> &lt;&lt; "\</a:t>
+            </a:r>
+            <a:r>
+              <a:rPr lang="en-US" dirty="0" err="1"/>
+              <a:t>nStudent</a:t>
+            </a:r>
+            <a:r>
+              <a:rPr lang="en-US" dirty="0"/>
+              <a:t> Details:\n";</a:t>
+            </a:r>
+          </a:p>
+          <a:p>
+            <a:pPr marL="0" indent="0">
+              <a:buNone/>
+            </a:pPr>
+            <a:r>
+              <a:rPr lang="en-US" dirty="0"/>
+              <a:t>    for (int </a:t>
+            </a:r>
+            <a:r>
+              <a:rPr lang="en-US" dirty="0" err="1"/>
+              <a:t>i</a:t>
+            </a:r>
+            <a:r>
+              <a:rPr lang="en-US" dirty="0"/>
+              <a:t> = 0; </a:t>
+            </a:r>
+            <a:r>
+              <a:rPr lang="en-US" dirty="0" err="1"/>
+              <a:t>i</a:t>
+            </a:r>
+            <a:r>
+              <a:rPr lang="en-US" dirty="0"/>
+              <a:t> &lt; n; </a:t>
+            </a:r>
+            <a:r>
+              <a:rPr lang="en-US" dirty="0" err="1"/>
+              <a:t>i</a:t>
+            </a:r>
+            <a:r>
+              <a:rPr lang="en-US" dirty="0"/>
+              <a:t>++) {</a:t>
+            </a:r>
+          </a:p>
+          <a:p>
+            <a:pPr marL="0" indent="0">
+              <a:buNone/>
+            </a:pPr>
+            <a:r>
+              <a:rPr lang="en-US" dirty="0"/>
+              <a:t>        </a:t>
+            </a:r>
+            <a:r>
+              <a:rPr lang="en-US" dirty="0" err="1"/>
+              <a:t>cout</a:t>
+            </a:r>
+            <a:r>
+              <a:rPr lang="en-US" dirty="0"/>
+              <a:t> &lt;&lt; "\</a:t>
+            </a:r>
+            <a:r>
+              <a:rPr lang="en-US" dirty="0" err="1"/>
+              <a:t>nStudent</a:t>
+            </a:r>
+            <a:r>
+              <a:rPr lang="en-US" dirty="0"/>
+              <a:t> " &lt;&lt; </a:t>
+            </a:r>
+            <a:r>
+              <a:rPr lang="en-US" dirty="0" err="1"/>
+              <a:t>i</a:t>
+            </a:r>
+            <a:r>
+              <a:rPr lang="en-US" dirty="0"/>
+              <a:t> + 1 &lt;&lt; </a:t>
+            </a:r>
+            <a:r>
+              <a:rPr lang="en-US" dirty="0" err="1"/>
+              <a:t>endl</a:t>
+            </a:r>
+            <a:r>
+              <a:rPr lang="en-US" dirty="0"/>
+              <a:t>;</a:t>
+            </a:r>
+          </a:p>
+          <a:p>
+            <a:pPr marL="0" indent="0">
+              <a:buNone/>
+            </a:pPr>
+            <a:r>
+              <a:rPr lang="en-US" dirty="0"/>
+              <a:t>        s[</a:t>
+            </a:r>
+            <a:r>
+              <a:rPr lang="en-US" dirty="0" err="1"/>
+              <a:t>i</a:t>
+            </a:r>
+            <a:r>
+              <a:rPr lang="en-US" dirty="0"/>
+              <a:t>].display();</a:t>
+            </a:r>
+          </a:p>
+          <a:p>
+            <a:pPr marL="0" indent="0">
+              <a:buNone/>
+            </a:pPr>
+            <a:r>
+              <a:rPr lang="en-US" dirty="0"/>
+              <a:t>    }</a:t>
+            </a:r>
+          </a:p>
+          <a:p>
+            <a:pPr marL="0" indent="0">
+              <a:buNone/>
+            </a:pPr>
+            <a:endParaRPr lang="en-US" dirty="0"/>
+          </a:p>
+          <a:p>
+            <a:pPr marL="0" indent="0">
+              <a:buNone/>
+            </a:pPr>
+            <a:r>
+              <a:rPr lang="en-US" dirty="0"/>
+              <a:t>  delete[] s;</a:t>
+            </a:r>
+          </a:p>
+          <a:p>
+            <a:pPr marL="0" indent="0">
+              <a:buNone/>
+            </a:pPr>
+            <a:endParaRPr lang="en-US" dirty="0"/>
+          </a:p>
+          <a:p>
+            <a:pPr marL="0" indent="0">
+              <a:buNone/>
+            </a:pPr>
+            <a:r>
+              <a:rPr lang="en-US" dirty="0"/>
+              <a:t>    return 0;</a:t>
+            </a:r>
+          </a:p>
+          <a:p>
+            <a:pPr marL="0" indent="0">
+              <a:buNone/>
+            </a:pPr>
+            <a:r>
+              <a:rPr lang="en-US" dirty="0"/>
+              <a:t>}</a:t>
+            </a:r>
+          </a:p>
+        </p:txBody>
+      </p:sp>
+    </p:spTree>
+    <p:extLst>
+      <p:ext uri="{BB962C8B-B14F-4D97-AF65-F5344CB8AC3E}">
+        <p14:creationId xmlns:p14="http://schemas.microsoft.com/office/powerpoint/2010/main" val="3871730382"/>
+      </p:ext>
+    </p:extLst>
+  </p:cSld>
+  <p:clrMapOvr>
+    <a:masterClrMapping/>
+  </p:clrMapOvr>
+  <p:timing>
+    <p:tnLst>
+      <p:par>
+        <p:cTn id="1" dur="indefinite" restart="never" nodeType="tmRoot"/>
+      </p:par>
+    </p:tnLst>
+  </p:timing>
 </p:sld>
 </file>
 
@@ -8667,6 +9501,424 @@
   <p:clrMapOvr>
     <a:masterClrMapping/>
   </p:clrMapOvr>
+  <p:timing>
+    <p:tnLst>
+      <p:par>
+        <p:cTn id="1" dur="indefinite" restart="never" nodeType="tmRoot"/>
+      </p:par>
+    </p:tnLst>
+  </p:timing>
+</p:sld>
+</file>
+
+<file path=ppt/slides/slide20.xml><?xml version="1.0" encoding="utf-8"?>
+<p:sld xmlns:a="http://schemas.openxmlformats.org/drawingml/2006/main" xmlns:r="http://schemas.openxmlformats.org/officeDocument/2006/relationships" xmlns:p="http://schemas.openxmlformats.org/presentationml/2006/main">
+  <p:cSld>
+    <p:spTree>
+      <p:nvGrpSpPr>
+        <p:cNvPr id="1" name=""/>
+        <p:cNvGrpSpPr/>
+        <p:nvPr/>
+      </p:nvGrpSpPr>
+      <p:grpSpPr>
+        <a:xfrm>
+          <a:off x="0" y="0"/>
+          <a:ext cx="0" cy="0"/>
+          <a:chOff x="0" y="0"/>
+          <a:chExt cx="0" cy="0"/>
+        </a:xfrm>
+      </p:grpSpPr>
+      <p:sp>
+        <p:nvSpPr>
+          <p:cNvPr id="2" name="Title 1">
+            <a:extLst>
+              <a:ext uri="{FF2B5EF4-FFF2-40B4-BE49-F238E27FC236}">
+                <a16:creationId xmlns:a16="http://schemas.microsoft.com/office/drawing/2014/main" id="{F5679DB5-23F2-C2A7-96B4-BB2FD2EF9E77}"/>
+              </a:ext>
+            </a:extLst>
+          </p:cNvPr>
+          <p:cNvSpPr>
+            <a:spLocks noGrp="1"/>
+          </p:cNvSpPr>
+          <p:nvPr>
+            <p:ph type="title"/>
+          </p:nvPr>
+        </p:nvSpPr>
+        <p:spPr/>
+        <p:txBody>
+          <a:bodyPr/>
+          <a:lstStyle/>
+          <a:p>
+            <a:r>
+              <a:rPr lang="en-US" dirty="0"/>
+              <a:t>Exercise</a:t>
+            </a:r>
+            <a:br>
+              <a:rPr lang="en-US" dirty="0"/>
+            </a:br>
+            <a:endParaRPr lang="en-US" dirty="0"/>
+          </a:p>
+        </p:txBody>
+      </p:sp>
+      <p:sp>
+        <p:nvSpPr>
+          <p:cNvPr id="3" name="Content Placeholder 2">
+            <a:extLst>
+              <a:ext uri="{FF2B5EF4-FFF2-40B4-BE49-F238E27FC236}">
+                <a16:creationId xmlns:a16="http://schemas.microsoft.com/office/drawing/2014/main" id="{471ACDE0-3DF2-F050-4A30-F915E2049D23}"/>
+              </a:ext>
+            </a:extLst>
+          </p:cNvPr>
+          <p:cNvSpPr>
+            <a:spLocks noGrp="1"/>
+          </p:cNvSpPr>
+          <p:nvPr>
+            <p:ph idx="1"/>
+          </p:nvPr>
+        </p:nvSpPr>
+        <p:spPr>
+          <a:xfrm>
+            <a:off x="677333" y="1294229"/>
+            <a:ext cx="10534617" cy="5317586"/>
+          </a:xfrm>
+        </p:spPr>
+        <p:txBody>
+          <a:bodyPr>
+            <a:normAutofit/>
+          </a:bodyPr>
+          <a:lstStyle/>
+          <a:p>
+            <a:r>
+              <a:rPr lang="en-US" dirty="0"/>
+              <a:t>Exercise 1: Dynamic Array of Objects (Basic)Create a class Student with</a:t>
+            </a:r>
+            <a:r>
+              <a:rPr lang="en-US" dirty="0" smtClean="0"/>
+              <a:t>: Student ID, Name, CGPA. </a:t>
+            </a:r>
+            <a:r>
+              <a:rPr lang="en-US" dirty="0" err="1" smtClean="0"/>
+              <a:t>Requirements:Take</a:t>
+            </a:r>
+            <a:r>
+              <a:rPr lang="en-US" dirty="0" smtClean="0"/>
+              <a:t> </a:t>
+            </a:r>
+            <a:r>
+              <a:rPr lang="en-US" dirty="0"/>
+              <a:t>the number of students </a:t>
+            </a:r>
+            <a:r>
+              <a:rPr lang="en-US" dirty="0" err="1"/>
+              <a:t>dynamically.Allocate</a:t>
+            </a:r>
+            <a:r>
+              <a:rPr lang="en-US" dirty="0"/>
+              <a:t> memory using new</a:t>
+            </a:r>
+            <a:r>
+              <a:rPr lang="en-US" dirty="0" smtClean="0"/>
+              <a:t>. Input </a:t>
+            </a:r>
+            <a:r>
+              <a:rPr lang="en-US" dirty="0"/>
+              <a:t>and display student </a:t>
+            </a:r>
+            <a:r>
+              <a:rPr lang="en-US" dirty="0" err="1"/>
+              <a:t>information.Release</a:t>
+            </a:r>
+            <a:r>
+              <a:rPr lang="en-US" dirty="0"/>
+              <a:t> memory using delete[].</a:t>
+            </a:r>
+          </a:p>
+          <a:p>
+            <a:r>
+              <a:rPr lang="en-US" dirty="0"/>
+              <a:t>Exercise 2: Dynamic Memory Allocation for Employee </a:t>
+            </a:r>
+            <a:r>
+              <a:rPr lang="en-US" dirty="0" smtClean="0"/>
+              <a:t>Records Create </a:t>
+            </a:r>
+            <a:r>
+              <a:rPr lang="en-US" dirty="0"/>
+              <a:t>a class Employee </a:t>
+            </a:r>
+            <a:r>
+              <a:rPr lang="en-US" dirty="0" err="1"/>
+              <a:t>with:Employee</a:t>
+            </a:r>
+            <a:r>
+              <a:rPr lang="en-US" dirty="0"/>
+              <a:t> </a:t>
+            </a:r>
+            <a:r>
+              <a:rPr lang="en-US" dirty="0" smtClean="0"/>
+              <a:t>Name, </a:t>
+            </a:r>
+            <a:r>
+              <a:rPr lang="en-US" dirty="0" smtClean="0"/>
+              <a:t>Employee </a:t>
+            </a:r>
+            <a:r>
+              <a:rPr lang="en-US" dirty="0" smtClean="0"/>
+              <a:t>ID, </a:t>
+            </a:r>
+            <a:r>
+              <a:rPr lang="en-US" dirty="0" smtClean="0"/>
+              <a:t>Salary .</a:t>
+            </a:r>
+            <a:r>
+              <a:rPr lang="en-US" dirty="0" err="1" smtClean="0"/>
+              <a:t>Requirements:Dynamically</a:t>
+            </a:r>
+            <a:r>
+              <a:rPr lang="en-US" dirty="0" smtClean="0"/>
+              <a:t> </a:t>
+            </a:r>
+            <a:r>
+              <a:rPr lang="en-US" dirty="0"/>
+              <a:t>allocate memory for multiple employees</a:t>
+            </a:r>
+            <a:r>
+              <a:rPr lang="en-US" dirty="0" smtClean="0"/>
+              <a:t>. Display </a:t>
+            </a:r>
+            <a:r>
+              <a:rPr lang="en-US" dirty="0"/>
+              <a:t>the employee with the highest salary.</a:t>
+            </a:r>
+          </a:p>
+          <a:p>
+            <a:r>
+              <a:rPr lang="en-US" dirty="0"/>
+              <a:t>Exercise 3: Constructor and Destructor with Dynamic </a:t>
+            </a:r>
+            <a:r>
+              <a:rPr lang="en-US" dirty="0" err="1" smtClean="0"/>
+              <a:t>Allocation.Create</a:t>
+            </a:r>
+            <a:r>
+              <a:rPr lang="en-US" dirty="0" smtClean="0"/>
+              <a:t> </a:t>
+            </a:r>
+            <a:r>
+              <a:rPr lang="en-US" dirty="0"/>
+              <a:t>a class Book </a:t>
+            </a:r>
+            <a:r>
+              <a:rPr lang="en-US" dirty="0" err="1"/>
+              <a:t>with:Book</a:t>
+            </a:r>
+            <a:r>
+              <a:rPr lang="en-US" dirty="0"/>
+              <a:t> </a:t>
+            </a:r>
+            <a:r>
+              <a:rPr lang="en-US" dirty="0" smtClean="0"/>
+              <a:t>Name, Author </a:t>
+            </a:r>
+            <a:r>
+              <a:rPr lang="en-US" dirty="0" err="1" smtClean="0"/>
+              <a:t>Name,Price</a:t>
+            </a:r>
+            <a:r>
+              <a:rPr lang="en-US" dirty="0" smtClean="0"/>
+              <a:t>. </a:t>
+            </a:r>
+            <a:r>
+              <a:rPr lang="en-US" dirty="0" err="1" smtClean="0"/>
+              <a:t>Requirements:Use</a:t>
+            </a:r>
+            <a:r>
+              <a:rPr lang="en-US" dirty="0" smtClean="0"/>
+              <a:t> </a:t>
+            </a:r>
+            <a:r>
+              <a:rPr lang="en-US" dirty="0"/>
+              <a:t>parameterized constructor</a:t>
+            </a:r>
+            <a:r>
+              <a:rPr lang="en-US" dirty="0" smtClean="0"/>
+              <a:t>. Create </a:t>
+            </a:r>
+            <a:r>
+              <a:rPr lang="en-US" dirty="0"/>
+              <a:t>an array of book objects dynamically</a:t>
+            </a:r>
+            <a:r>
+              <a:rPr lang="en-US" dirty="0" smtClean="0"/>
+              <a:t>. Destructor </a:t>
+            </a:r>
+            <a:r>
+              <a:rPr lang="en-US" dirty="0"/>
+              <a:t>should print</a:t>
+            </a:r>
+            <a:r>
+              <a:rPr lang="en-US" dirty="0"/>
+              <a:t>: with</a:t>
+            </a:r>
+            <a:r>
+              <a:rPr lang="en-US" dirty="0" smtClean="0"/>
+              <a:t>: Book Name deleted.</a:t>
+            </a:r>
+            <a:endParaRPr lang="en-US" dirty="0"/>
+          </a:p>
+          <a:p>
+            <a:r>
+              <a:rPr lang="en-US" dirty="0"/>
+              <a:t>Dynamic Memory Allocation Using Pointer to </a:t>
+            </a:r>
+            <a:r>
+              <a:rPr lang="en-US" dirty="0" err="1"/>
+              <a:t>ObjectCreate</a:t>
+            </a:r>
+            <a:r>
+              <a:rPr lang="en-US" dirty="0"/>
+              <a:t> a class Rectangle</a:t>
+            </a:r>
+            <a:r>
+              <a:rPr lang="en-US" dirty="0" smtClean="0"/>
+              <a:t>. Requirements: Dynamically </a:t>
+            </a:r>
+            <a:r>
+              <a:rPr lang="en-US" dirty="0"/>
+              <a:t>create one object using pointer</a:t>
+            </a:r>
+            <a:r>
+              <a:rPr lang="en-US" dirty="0" smtClean="0"/>
+              <a:t>. Input </a:t>
+            </a:r>
+            <a:r>
+              <a:rPr lang="en-US" dirty="0"/>
+              <a:t>length and width</a:t>
+            </a:r>
+            <a:r>
+              <a:rPr lang="en-US" dirty="0" smtClean="0"/>
+              <a:t>. Calculate </a:t>
+            </a:r>
+            <a:r>
+              <a:rPr lang="en-US" dirty="0"/>
+              <a:t>area</a:t>
+            </a:r>
+            <a:r>
+              <a:rPr lang="en-US" dirty="0" smtClean="0"/>
+              <a:t>. Example: Rectangle </a:t>
+            </a:r>
+            <a:r>
+              <a:rPr lang="en-US" dirty="0"/>
+              <a:t>*r = new Rectangle;</a:t>
+            </a:r>
+          </a:p>
+        </p:txBody>
+      </p:sp>
+    </p:spTree>
+    <p:extLst>
+      <p:ext uri="{BB962C8B-B14F-4D97-AF65-F5344CB8AC3E}">
+        <p14:creationId xmlns:p14="http://schemas.microsoft.com/office/powerpoint/2010/main" val="320289016"/>
+      </p:ext>
+    </p:extLst>
+  </p:cSld>
+  <p:clrMapOvr>
+    <a:masterClrMapping/>
+  </p:clrMapOvr>
+  <p:timing>
+    <p:tnLst>
+      <p:par>
+        <p:cTn id="1" dur="indefinite" restart="never" nodeType="tmRoot"/>
+      </p:par>
+    </p:tnLst>
+  </p:timing>
+</p:sld>
+</file>
+
+<file path=ppt/slides/slide21.xml><?xml version="1.0" encoding="utf-8"?>
+<p:sld xmlns:a="http://schemas.openxmlformats.org/drawingml/2006/main" xmlns:r="http://schemas.openxmlformats.org/officeDocument/2006/relationships" xmlns:p="http://schemas.openxmlformats.org/presentationml/2006/main">
+  <p:cSld>
+    <p:spTree>
+      <p:nvGrpSpPr>
+        <p:cNvPr id="1" name=""/>
+        <p:cNvGrpSpPr/>
+        <p:nvPr/>
+      </p:nvGrpSpPr>
+      <p:grpSpPr>
+        <a:xfrm>
+          <a:off x="0" y="0"/>
+          <a:ext cx="0" cy="0"/>
+          <a:chOff x="0" y="0"/>
+          <a:chExt cx="0" cy="0"/>
+        </a:xfrm>
+      </p:grpSpPr>
+      <p:sp>
+        <p:nvSpPr>
+          <p:cNvPr id="2" name="Title 1"/>
+          <p:cNvSpPr>
+            <a:spLocks noGrp="1"/>
+          </p:cNvSpPr>
+          <p:nvPr>
+            <p:ph type="title"/>
+          </p:nvPr>
+        </p:nvSpPr>
+        <p:spPr/>
+        <p:txBody>
+          <a:bodyPr/>
+          <a:lstStyle/>
+          <a:p>
+            <a:endParaRPr lang="en-US"/>
+          </a:p>
+        </p:txBody>
+      </p:sp>
+      <p:sp>
+        <p:nvSpPr>
+          <p:cNvPr id="3" name="Content Placeholder 2"/>
+          <p:cNvSpPr>
+            <a:spLocks noGrp="1"/>
+          </p:cNvSpPr>
+          <p:nvPr>
+            <p:ph idx="1"/>
+          </p:nvPr>
+        </p:nvSpPr>
+        <p:spPr>
+          <a:xfrm>
+            <a:off x="677334" y="2160589"/>
+            <a:ext cx="6436160" cy="3880773"/>
+          </a:xfrm>
+        </p:spPr>
+        <p:txBody>
+          <a:bodyPr>
+            <a:normAutofit/>
+          </a:bodyPr>
+          <a:lstStyle/>
+          <a:p>
+            <a:pPr marL="0" indent="0" algn="r">
+              <a:buNone/>
+            </a:pPr>
+            <a:r>
+              <a:rPr lang="en-US" sz="4800" dirty="0"/>
+              <a:t>Thank you !!!</a:t>
+            </a:r>
+          </a:p>
+        </p:txBody>
+      </p:sp>
+    </p:spTree>
+    <p:extLst>
+      <p:ext uri="{BB962C8B-B14F-4D97-AF65-F5344CB8AC3E}">
+        <p14:creationId xmlns:p14="http://schemas.microsoft.com/office/powerpoint/2010/main" val="126121837"/>
+      </p:ext>
+    </p:extLst>
+  </p:cSld>
+  <p:clrMapOvr>
+    <a:masterClrMapping/>
+  </p:clrMapOvr>
+  <p:timing>
+    <p:tnLst>
+      <p:par>
+        <p:cTn id="1" dur="indefinite" restart="never" nodeType="tmRoot"/>
+      </p:par>
+    </p:tnLst>
+  </p:timing>
 </p:sld>
 </file>
 
@@ -8774,6 +10026,13 @@
   <p:clrMapOvr>
     <a:masterClrMapping/>
   </p:clrMapOvr>
+  <p:timing>
+    <p:tnLst>
+      <p:par>
+        <p:cTn id="1" dur="indefinite" restart="never" nodeType="tmRoot"/>
+      </p:par>
+    </p:tnLst>
+  </p:timing>
 </p:sld>
 </file>
 
@@ -9056,6 +10315,13 @@
   <p:clrMapOvr>
     <a:masterClrMapping/>
   </p:clrMapOvr>
+  <p:timing>
+    <p:tnLst>
+      <p:par>
+        <p:cTn id="1" dur="indefinite" restart="never" nodeType="tmRoot"/>
+      </p:par>
+    </p:tnLst>
+  </p:timing>
 </p:sld>
 </file>
 
@@ -9160,6 +10426,13 @@
   <p:clrMapOvr>
     <a:masterClrMapping/>
   </p:clrMapOvr>
+  <p:timing>
+    <p:tnLst>
+      <p:par>
+        <p:cTn id="1" dur="indefinite" restart="never" nodeType="tmRoot"/>
+      </p:par>
+    </p:tnLst>
+  </p:timing>
 </p:sld>
 </file>
 
@@ -9377,6 +10650,13 @@
   <p:clrMapOvr>
     <a:masterClrMapping/>
   </p:clrMapOvr>
+  <p:timing>
+    <p:tnLst>
+      <p:par>
+        <p:cTn id="1" dur="indefinite" restart="never" nodeType="tmRoot"/>
+      </p:par>
+    </p:tnLst>
+  </p:timing>
 </p:sld>
 </file>
 
@@ -9487,6 +10767,13 @@
   <p:clrMapOvr>
     <a:masterClrMapping/>
   </p:clrMapOvr>
+  <p:timing>
+    <p:tnLst>
+      <p:par>
+        <p:cTn id="1" dur="indefinite" restart="never" nodeType="tmRoot"/>
+      </p:par>
+    </p:tnLst>
+  </p:timing>
 </p:sld>
 </file>
 
@@ -9897,6 +11184,13 @@
   <p:clrMapOvr>
     <a:masterClrMapping/>
   </p:clrMapOvr>
+  <p:timing>
+    <p:tnLst>
+      <p:par>
+        <p:cTn id="1" dur="indefinite" restart="never" nodeType="tmRoot"/>
+      </p:par>
+    </p:tnLst>
+  </p:timing>
 </p:sld>
 </file>
 
@@ -10025,6 +11319,13 @@
   <p:clrMapOvr>
     <a:masterClrMapping/>
   </p:clrMapOvr>
+  <p:timing>
+    <p:tnLst>
+      <p:par>
+        <p:cTn id="1" dur="indefinite" restart="never" nodeType="tmRoot"/>
+      </p:par>
+    </p:tnLst>
+  </p:timing>
 </p:sld>
 </file>
 
